--- a/VENTAPEL_BRASIL_COMERCIAL_IMPO.pptx
+++ b/VENTAPEL_BRASIL_COMERCIAL_IMPO.pptx
@@ -162,10 +162,10 @@
                 <c:formatCode>General</c:formatCode>
                 <c:ptCount val="2"/>
                 <c:pt idx="0">
-                  <c:v>11</c:v>
+                  <c:v>0</c:v>
                 </c:pt>
                 <c:pt idx="1">
-                  <c:v>22</c:v>
+                  <c:v>23</c:v>
                 </c:pt>
               </c:numCache>
             </c:numRef>
@@ -214,7 +214,7 @@
                   <c:v>0</c:v>
                 </c:pt>
                 <c:pt idx="1">
-                  <c:v>12</c:v>
+                  <c:v>11</c:v>
                 </c:pt>
               </c:numCache>
             </c:numRef>
@@ -3688,7 +3688,7 @@
         <p:spPr>
           <a:xfrm>
             <a:off x="1005840" y="2240279"/>
-            <a:ext cx="2377439" cy="891540"/>
+            <a:ext cx="2377440" cy="868680"/>
           </a:xfrm>
           <a:prstGeom prst="rect">
             <a:avLst/>
@@ -3722,8 +3722,8 @@
         </p:nvSpPr>
         <p:spPr>
           <a:xfrm>
-            <a:off x="1005840" y="3058668"/>
-            <a:ext cx="2377439" cy="548640"/>
+            <a:off x="1005840" y="3090672"/>
+            <a:ext cx="2377440" cy="411480"/>
           </a:xfrm>
           <a:prstGeom prst="rect">
             <a:avLst/>
@@ -3803,7 +3803,7 @@
         <p:spPr>
           <a:xfrm>
             <a:off x="3931920" y="2240279"/>
-            <a:ext cx="2377439" cy="891540"/>
+            <a:ext cx="2377440" cy="868680"/>
           </a:xfrm>
           <a:prstGeom prst="rect">
             <a:avLst/>
@@ -3824,7 +3824,7 @@
                 </a:solidFill>
                 <a:latin typeface="Calibri"/>
               </a:rPr>
-              <a:t>22</a:t>
+              <a:t>23</a:t>
             </a:r>
           </a:p>
         </p:txBody>
@@ -3837,8 +3837,8 @@
         </p:nvSpPr>
         <p:spPr>
           <a:xfrm>
-            <a:off x="3931920" y="3058668"/>
-            <a:ext cx="2377439" cy="548640"/>
+            <a:off x="3931920" y="3090672"/>
+            <a:ext cx="2377440" cy="411480"/>
           </a:xfrm>
           <a:prstGeom prst="rect">
             <a:avLst/>
@@ -3918,7 +3918,7 @@
         <p:spPr>
           <a:xfrm>
             <a:off x="6858000" y="2240279"/>
-            <a:ext cx="2377439" cy="891540"/>
+            <a:ext cx="2377440" cy="868680"/>
           </a:xfrm>
           <a:prstGeom prst="rect">
             <a:avLst/>
@@ -3939,7 +3939,7 @@
                 </a:solidFill>
                 <a:latin typeface="Calibri"/>
               </a:rPr>
-              <a:t>12</a:t>
+              <a:t>11</a:t>
             </a:r>
           </a:p>
         </p:txBody>
@@ -3952,8 +3952,8 @@
         </p:nvSpPr>
         <p:spPr>
           <a:xfrm>
-            <a:off x="6858000" y="3058668"/>
-            <a:ext cx="2377439" cy="548640"/>
+            <a:off x="6858000" y="3090672"/>
+            <a:ext cx="2377440" cy="411480"/>
           </a:xfrm>
           <a:prstGeom prst="rect">
             <a:avLst/>
@@ -4033,7 +4033,7 @@
         <p:spPr>
           <a:xfrm>
             <a:off x="9784080" y="2240279"/>
-            <a:ext cx="2377439" cy="891540"/>
+            <a:ext cx="2377440" cy="868680"/>
           </a:xfrm>
           <a:prstGeom prst="rect">
             <a:avLst/>
@@ -4054,7 +4054,7 @@
                 </a:solidFill>
                 <a:latin typeface="Calibri"/>
               </a:rPr>
-              <a:t>64.7%</a:t>
+              <a:t>67.6%</a:t>
             </a:r>
           </a:p>
         </p:txBody>
@@ -4067,8 +4067,8 @@
         </p:nvSpPr>
         <p:spPr>
           <a:xfrm>
-            <a:off x="9784080" y="3058668"/>
-            <a:ext cx="2377439" cy="548640"/>
+            <a:off x="9784080" y="3090672"/>
+            <a:ext cx="2377440" cy="411480"/>
           </a:xfrm>
           <a:prstGeom prst="rect">
             <a:avLst/>
@@ -4121,7 +4121,7 @@
               <a:tr h="475488">
                 <a:tc>
                   <a:txBody>
-                    <a:bodyPr wrap="square"/>
+                    <a:bodyPr/>
                     <a:lstStyle/>
                     <a:p>
                       <a:pPr algn="ctr"/>
@@ -4144,7 +4144,7 @@
                 </a:tc>
                 <a:tc>
                   <a:txBody>
-                    <a:bodyPr wrap="square"/>
+                    <a:bodyPr/>
                     <a:lstStyle/>
                     <a:p>
                       <a:pPr algn="ctr"/>
@@ -4167,7 +4167,7 @@
                 </a:tc>
                 <a:tc>
                   <a:txBody>
-                    <a:bodyPr wrap="square"/>
+                    <a:bodyPr/>
                     <a:lstStyle/>
                     <a:p>
                       <a:pPr algn="ctr"/>
@@ -4190,7 +4190,7 @@
                 </a:tc>
                 <a:tc>
                   <a:txBody>
-                    <a:bodyPr wrap="square"/>
+                    <a:bodyPr/>
                     <a:lstStyle/>
                     <a:p>
                       <a:pPr algn="ctr"/>
@@ -4215,53 +4215,53 @@
               <a:tr h="475488">
                 <a:tc>
                   <a:txBody>
-                    <a:bodyPr wrap="square"/>
-                    <a:lstStyle/>
-                    <a:p>
-                      <a:pPr algn="l"/>
-                      <a:r>
-                        <a:rPr sz="1000" b="0">
-                          <a:solidFill>
-                            <a:srgbClr val="1D1B43"/>
-                          </a:solidFill>
-                          <a:latin typeface="Calibri"/>
-                        </a:rPr>
-                        <a:t>Total Entregas</a:t>
-                      </a:r>
-                    </a:p>
-                  </a:txBody>
-                  <a:tcPr>
-                    <a:solidFill>
-                      <a:srgbClr val="FFFFFF"/>
-                    </a:solidFill>
-                  </a:tcPr>
-                </a:tc>
-                <a:tc>
-                  <a:txBody>
-                    <a:bodyPr wrap="square"/>
-                    <a:lstStyle/>
-                    <a:p>
-                      <a:pPr algn="l"/>
-                      <a:r>
-                        <a:rPr sz="1000" b="0">
-                          <a:solidFill>
-                            <a:srgbClr val="1D1B43"/>
-                          </a:solidFill>
-                          <a:latin typeface="Calibri"/>
-                        </a:rPr>
-                        <a:t>11</a:t>
-                      </a:r>
-                    </a:p>
-                  </a:txBody>
-                  <a:tcPr>
-                    <a:solidFill>
-                      <a:srgbClr val="FFFFFF"/>
-                    </a:solidFill>
-                  </a:tcPr>
-                </a:tc>
-                <a:tc>
-                  <a:txBody>
-                    <a:bodyPr wrap="square"/>
+                    <a:bodyPr/>
+                    <a:lstStyle/>
+                    <a:p>
+                      <a:pPr algn="l"/>
+                      <a:r>
+                        <a:rPr sz="1000" b="0">
+                          <a:solidFill>
+                            <a:srgbClr val="1D1B43"/>
+                          </a:solidFill>
+                          <a:latin typeface="Calibri"/>
+                        </a:rPr>
+                        <a:t>Total</a:t>
+                      </a:r>
+                    </a:p>
+                  </a:txBody>
+                  <a:tcPr>
+                    <a:solidFill>
+                      <a:srgbClr val="FFFFFF"/>
+                    </a:solidFill>
+                  </a:tcPr>
+                </a:tc>
+                <a:tc>
+                  <a:txBody>
+                    <a:bodyPr/>
+                    <a:lstStyle/>
+                    <a:p>
+                      <a:pPr algn="l"/>
+                      <a:r>
+                        <a:rPr sz="1000" b="0">
+                          <a:solidFill>
+                            <a:srgbClr val="1D1B43"/>
+                          </a:solidFill>
+                          <a:latin typeface="Calibri"/>
+                        </a:rPr>
+                        <a:t>0</a:t>
+                      </a:r>
+                    </a:p>
+                  </a:txBody>
+                  <a:tcPr>
+                    <a:solidFill>
+                      <a:srgbClr val="FFFFFF"/>
+                    </a:solidFill>
+                  </a:tcPr>
+                </a:tc>
+                <a:tc>
+                  <a:txBody>
+                    <a:bodyPr/>
                     <a:lstStyle/>
                     <a:p>
                       <a:pPr algn="l"/>
@@ -4284,18 +4284,18 @@
                 </a:tc>
                 <a:tc>
                   <a:txBody>
-                    <a:bodyPr wrap="square"/>
-                    <a:lstStyle/>
-                    <a:p>
-                      <a:pPr algn="l"/>
-                      <a:r>
-                        <a:rPr sz="1000" b="0">
-                          <a:solidFill>
-                            <a:srgbClr val="1D1B43"/>
-                          </a:solidFill>
-                          <a:latin typeface="Calibri"/>
-                        </a:rPr>
-                        <a:t>+ 23</a:t>
+                    <a:bodyPr/>
+                    <a:lstStyle/>
+                    <a:p>
+                      <a:pPr algn="l"/>
+                      <a:r>
+                        <a:rPr sz="1000" b="0">
+                          <a:solidFill>
+                            <a:srgbClr val="1D1B43"/>
+                          </a:solidFill>
+                          <a:latin typeface="Calibri"/>
+                        </a:rPr>
+                        <a:t>+ 34</a:t>
                       </a:r>
                     </a:p>
                   </a:txBody>
@@ -4309,7 +4309,7 @@
               <a:tr h="475488">
                 <a:tc>
                   <a:txBody>
-                    <a:bodyPr wrap="square"/>
+                    <a:bodyPr/>
                     <a:lstStyle/>
                     <a:p>
                       <a:pPr algn="l"/>
@@ -4332,18 +4332,18 @@
                 </a:tc>
                 <a:tc>
                   <a:txBody>
-                    <a:bodyPr wrap="square"/>
-                    <a:lstStyle/>
-                    <a:p>
-                      <a:pPr algn="l"/>
-                      <a:r>
-                        <a:rPr sz="1000" b="0">
-                          <a:solidFill>
-                            <a:srgbClr val="1D1B43"/>
-                          </a:solidFill>
-                          <a:latin typeface="Calibri"/>
-                        </a:rPr>
-                        <a:t>11</a:t>
+                    <a:bodyPr/>
+                    <a:lstStyle/>
+                    <a:p>
+                      <a:pPr algn="l"/>
+                      <a:r>
+                        <a:rPr sz="1000" b="0">
+                          <a:solidFill>
+                            <a:srgbClr val="1D1B43"/>
+                          </a:solidFill>
+                          <a:latin typeface="Calibri"/>
+                        </a:rPr>
+                        <a:t>0</a:t>
                       </a:r>
                     </a:p>
                   </a:txBody>
@@ -4355,18 +4355,18 @@
                 </a:tc>
                 <a:tc>
                   <a:txBody>
-                    <a:bodyPr wrap="square"/>
-                    <a:lstStyle/>
-                    <a:p>
-                      <a:pPr algn="l"/>
-                      <a:r>
-                        <a:rPr sz="1000" b="0">
-                          <a:solidFill>
-                            <a:srgbClr val="1D1B43"/>
-                          </a:solidFill>
-                          <a:latin typeface="Calibri"/>
-                        </a:rPr>
-                        <a:t>22</a:t>
+                    <a:bodyPr/>
+                    <a:lstStyle/>
+                    <a:p>
+                      <a:pPr algn="l"/>
+                      <a:r>
+                        <a:rPr sz="1000" b="0">
+                          <a:solidFill>
+                            <a:srgbClr val="1D1B43"/>
+                          </a:solidFill>
+                          <a:latin typeface="Calibri"/>
+                        </a:rPr>
+                        <a:t>23</a:t>
                       </a:r>
                     </a:p>
                   </a:txBody>
@@ -4378,18 +4378,18 @@
                 </a:tc>
                 <a:tc>
                   <a:txBody>
-                    <a:bodyPr wrap="square"/>
-                    <a:lstStyle/>
-                    <a:p>
-                      <a:pPr algn="l"/>
-                      <a:r>
-                        <a:rPr sz="1000" b="0">
-                          <a:solidFill>
-                            <a:srgbClr val="1D1B43"/>
-                          </a:solidFill>
-                          <a:latin typeface="Calibri"/>
-                        </a:rPr>
-                        <a:t>+ 11</a:t>
+                    <a:bodyPr/>
+                    <a:lstStyle/>
+                    <a:p>
+                      <a:pPr algn="l"/>
+                      <a:r>
+                        <a:rPr sz="1000" b="0">
+                          <a:solidFill>
+                            <a:srgbClr val="1D1B43"/>
+                          </a:solidFill>
+                          <a:latin typeface="Calibri"/>
+                        </a:rPr>
+                        <a:t>+ 23</a:t>
                       </a:r>
                     </a:p>
                   </a:txBody>
@@ -4403,30 +4403,30 @@
               <a:tr h="475488">
                 <a:tc>
                   <a:txBody>
-                    <a:bodyPr wrap="square"/>
-                    <a:lstStyle/>
-                    <a:p>
-                      <a:pPr algn="l"/>
-                      <a:r>
-                        <a:rPr sz="1000" b="0">
-                          <a:solidFill>
-                            <a:srgbClr val="1D1B43"/>
-                          </a:solidFill>
-                          <a:latin typeface="Calibri"/>
-                        </a:rPr>
-                        <a:t>Fora do Prazo</a:t>
-                      </a:r>
-                    </a:p>
-                  </a:txBody>
-                  <a:tcPr>
-                    <a:solidFill>
-                      <a:srgbClr val="FFFFFF"/>
-                    </a:solidFill>
-                  </a:tcPr>
-                </a:tc>
-                <a:tc>
-                  <a:txBody>
-                    <a:bodyPr wrap="square"/>
+                    <a:bodyPr/>
+                    <a:lstStyle/>
+                    <a:p>
+                      <a:pPr algn="l"/>
+                      <a:r>
+                        <a:rPr sz="1000" b="0">
+                          <a:solidFill>
+                            <a:srgbClr val="1D1B43"/>
+                          </a:solidFill>
+                          <a:latin typeface="Calibri"/>
+                        </a:rPr>
+                        <a:t>Fora Prazo</a:t>
+                      </a:r>
+                    </a:p>
+                  </a:txBody>
+                  <a:tcPr>
+                    <a:solidFill>
+                      <a:srgbClr val="FFFFFF"/>
+                    </a:solidFill>
+                  </a:tcPr>
+                </a:tc>
+                <a:tc>
+                  <a:txBody>
+                    <a:bodyPr/>
                     <a:lstStyle/>
                     <a:p>
                       <a:pPr algn="l"/>
@@ -4449,41 +4449,41 @@
                 </a:tc>
                 <a:tc>
                   <a:txBody>
-                    <a:bodyPr wrap="square"/>
-                    <a:lstStyle/>
-                    <a:p>
-                      <a:pPr algn="l"/>
-                      <a:r>
-                        <a:rPr sz="1000" b="0">
-                          <a:solidFill>
-                            <a:srgbClr val="1D1B43"/>
-                          </a:solidFill>
-                          <a:latin typeface="Calibri"/>
-                        </a:rPr>
-                        <a:t>12</a:t>
-                      </a:r>
-                    </a:p>
-                  </a:txBody>
-                  <a:tcPr>
-                    <a:solidFill>
-                      <a:srgbClr val="FFFFFF"/>
-                    </a:solidFill>
-                  </a:tcPr>
-                </a:tc>
-                <a:tc>
-                  <a:txBody>
-                    <a:bodyPr wrap="square"/>
-                    <a:lstStyle/>
-                    <a:p>
-                      <a:pPr algn="l"/>
-                      <a:r>
-                        <a:rPr sz="1000" b="0">
-                          <a:solidFill>
-                            <a:srgbClr val="1D1B43"/>
-                          </a:solidFill>
-                          <a:latin typeface="Calibri"/>
-                        </a:rPr>
-                        <a:t>+ 12</a:t>
+                    <a:bodyPr/>
+                    <a:lstStyle/>
+                    <a:p>
+                      <a:pPr algn="l"/>
+                      <a:r>
+                        <a:rPr sz="1000" b="0">
+                          <a:solidFill>
+                            <a:srgbClr val="1D1B43"/>
+                          </a:solidFill>
+                          <a:latin typeface="Calibri"/>
+                        </a:rPr>
+                        <a:t>11</a:t>
+                      </a:r>
+                    </a:p>
+                  </a:txBody>
+                  <a:tcPr>
+                    <a:solidFill>
+                      <a:srgbClr val="FFFFFF"/>
+                    </a:solidFill>
+                  </a:tcPr>
+                </a:tc>
+                <a:tc>
+                  <a:txBody>
+                    <a:bodyPr/>
+                    <a:lstStyle/>
+                    <a:p>
+                      <a:pPr algn="l"/>
+                      <a:r>
+                        <a:rPr sz="1000" b="0">
+                          <a:solidFill>
+                            <a:srgbClr val="1D1B43"/>
+                          </a:solidFill>
+                          <a:latin typeface="Calibri"/>
+                        </a:rPr>
+                        <a:t>+ 11</a:t>
                       </a:r>
                     </a:p>
                   </a:txBody>
@@ -4497,7 +4497,7 @@
               <a:tr h="475488">
                 <a:tc>
                   <a:txBody>
-                    <a:bodyPr wrap="square"/>
+                    <a:bodyPr/>
                     <a:lstStyle/>
                     <a:p>
                       <a:pPr algn="l"/>
@@ -4520,18 +4520,18 @@
                 </a:tc>
                 <a:tc>
                   <a:txBody>
-                    <a:bodyPr wrap="square"/>
-                    <a:lstStyle/>
-                    <a:p>
-                      <a:pPr algn="l"/>
-                      <a:r>
-                        <a:rPr sz="1000" b="0">
-                          <a:solidFill>
-                            <a:srgbClr val="1D1B43"/>
-                          </a:solidFill>
-                          <a:latin typeface="Calibri"/>
-                        </a:rPr>
-                        <a:t>100.0%</a:t>
+                    <a:bodyPr/>
+                    <a:lstStyle/>
+                    <a:p>
+                      <a:pPr algn="l"/>
+                      <a:r>
+                        <a:rPr sz="1000" b="0">
+                          <a:solidFill>
+                            <a:srgbClr val="1D1B43"/>
+                          </a:solidFill>
+                          <a:latin typeface="Calibri"/>
+                        </a:rPr>
+                        <a:t>67.6%</a:t>
                       </a:r>
                     </a:p>
                   </a:txBody>
@@ -4543,18 +4543,18 @@
                 </a:tc>
                 <a:tc>
                   <a:txBody>
-                    <a:bodyPr wrap="square"/>
-                    <a:lstStyle/>
-                    <a:p>
-                      <a:pPr algn="l"/>
-                      <a:r>
-                        <a:rPr sz="1000" b="0">
-                          <a:solidFill>
-                            <a:srgbClr val="1D1B43"/>
-                          </a:solidFill>
-                          <a:latin typeface="Calibri"/>
-                        </a:rPr>
-                        <a:t>64.7%</a:t>
+                    <a:bodyPr/>
+                    <a:lstStyle/>
+                    <a:p>
+                      <a:pPr algn="l"/>
+                      <a:r>
+                        <a:rPr sz="1000" b="0">
+                          <a:solidFill>
+                            <a:srgbClr val="1D1B43"/>
+                          </a:solidFill>
+                          <a:latin typeface="Calibri"/>
+                        </a:rPr>
+                        <a:t>67.6%</a:t>
                       </a:r>
                     </a:p>
                   </a:txBody>
@@ -4566,18 +4566,18 @@
                 </a:tc>
                 <a:tc>
                   <a:txBody>
-                    <a:bodyPr wrap="square"/>
-                    <a:lstStyle/>
-                    <a:p>
-                      <a:pPr algn="l"/>
-                      <a:r>
-                        <a:rPr sz="1000" b="0">
-                          <a:solidFill>
-                            <a:srgbClr val="1D1B43"/>
-                          </a:solidFill>
-                          <a:latin typeface="Calibri"/>
-                        </a:rPr>
-                        <a:t>- 35.3pp</a:t>
+                    <a:bodyPr/>
+                    <a:lstStyle/>
+                    <a:p>
+                      <a:pPr algn="l"/>
+                      <a:r>
+                        <a:rPr sz="1000" b="0">
+                          <a:solidFill>
+                            <a:srgbClr val="1D1B43"/>
+                          </a:solidFill>
+                          <a:latin typeface="Calibri"/>
+                        </a:rPr>
+                        <a:t>+ 0.0pp</a:t>
                       </a:r>
                     </a:p>
                   </a:txBody>
@@ -4766,7 +4766,7 @@
               <a:tr h="438912">
                 <a:tc>
                   <a:txBody>
-                    <a:bodyPr wrap="square"/>
+                    <a:bodyPr/>
                     <a:lstStyle/>
                     <a:p>
                       <a:pPr algn="ctr"/>
@@ -4789,7 +4789,7 @@
                 </a:tc>
                 <a:tc>
                   <a:txBody>
-                    <a:bodyPr wrap="square"/>
+                    <a:bodyPr/>
                     <a:lstStyle/>
                     <a:p>
                       <a:pPr algn="ctr"/>
@@ -4812,7 +4812,7 @@
                 </a:tc>
                 <a:tc>
                   <a:txBody>
-                    <a:bodyPr wrap="square"/>
+                    <a:bodyPr/>
                     <a:lstStyle/>
                     <a:p>
                       <a:pPr algn="ctr"/>
@@ -4835,7 +4835,7 @@
                 </a:tc>
                 <a:tc>
                   <a:txBody>
-                    <a:bodyPr wrap="square"/>
+                    <a:bodyPr/>
                     <a:lstStyle/>
                     <a:p>
                       <a:pPr algn="ctr"/>
@@ -4858,7 +4858,7 @@
                 </a:tc>
                 <a:tc>
                   <a:txBody>
-                    <a:bodyPr wrap="square"/>
+                    <a:bodyPr/>
                     <a:lstStyle/>
                     <a:p>
                       <a:pPr algn="ctr"/>
@@ -4883,7 +4883,7 @@
               <a:tr h="438912">
                 <a:tc>
                   <a:txBody>
-                    <a:bodyPr wrap="square"/>
+                    <a:bodyPr/>
                     <a:lstStyle/>
                     <a:p>
                       <a:pPr algn="l"/>
@@ -4906,53 +4906,7 @@
                 </a:tc>
                 <a:tc>
                   <a:txBody>
-                    <a:bodyPr wrap="square"/>
-                    <a:lstStyle/>
-                    <a:p>
-                      <a:pPr algn="l"/>
-                      <a:r>
-                        <a:rPr sz="1000" b="0">
-                          <a:solidFill>
-                            <a:srgbClr val="1D1B43"/>
-                          </a:solidFill>
-                          <a:latin typeface="Calibri"/>
-                        </a:rPr>
-                        <a:t>11</a:t>
-                      </a:r>
-                    </a:p>
-                  </a:txBody>
-                  <a:tcPr>
-                    <a:solidFill>
-                      <a:srgbClr val="FFFFFF"/>
-                    </a:solidFill>
-                  </a:tcPr>
-                </a:tc>
-                <a:tc>
-                  <a:txBody>
-                    <a:bodyPr wrap="square"/>
-                    <a:lstStyle/>
-                    <a:p>
-                      <a:pPr algn="l"/>
-                      <a:r>
-                        <a:rPr sz="1000" b="0">
-                          <a:solidFill>
-                            <a:srgbClr val="1D1B43"/>
-                          </a:solidFill>
-                          <a:latin typeface="Calibri"/>
-                        </a:rPr>
-                        <a:t>11</a:t>
-                      </a:r>
-                    </a:p>
-                  </a:txBody>
-                  <a:tcPr>
-                    <a:solidFill>
-                      <a:srgbClr val="FFFFFF"/>
-                    </a:solidFill>
-                  </a:tcPr>
-                </a:tc>
-                <a:tc>
-                  <a:txBody>
-                    <a:bodyPr wrap="square"/>
+                    <a:bodyPr/>
                     <a:lstStyle/>
                     <a:p>
                       <a:pPr algn="l"/>
@@ -4975,18 +4929,64 @@
                 </a:tc>
                 <a:tc>
                   <a:txBody>
-                    <a:bodyPr wrap="square"/>
-                    <a:lstStyle/>
-                    <a:p>
-                      <a:pPr algn="l"/>
-                      <a:r>
-                        <a:rPr sz="1000" b="0">
-                          <a:solidFill>
-                            <a:srgbClr val="1D1B43"/>
-                          </a:solidFill>
-                          <a:latin typeface="Calibri"/>
-                        </a:rPr>
-                        <a:t>100.0%</a:t>
+                    <a:bodyPr/>
+                    <a:lstStyle/>
+                    <a:p>
+                      <a:pPr algn="l"/>
+                      <a:r>
+                        <a:rPr sz="1000" b="0">
+                          <a:solidFill>
+                            <a:srgbClr val="1D1B43"/>
+                          </a:solidFill>
+                          <a:latin typeface="Calibri"/>
+                        </a:rPr>
+                        <a:t>0</a:t>
+                      </a:r>
+                    </a:p>
+                  </a:txBody>
+                  <a:tcPr>
+                    <a:solidFill>
+                      <a:srgbClr val="FFFFFF"/>
+                    </a:solidFill>
+                  </a:tcPr>
+                </a:tc>
+                <a:tc>
+                  <a:txBody>
+                    <a:bodyPr/>
+                    <a:lstStyle/>
+                    <a:p>
+                      <a:pPr algn="l"/>
+                      <a:r>
+                        <a:rPr sz="1000" b="0">
+                          <a:solidFill>
+                            <a:srgbClr val="1D1B43"/>
+                          </a:solidFill>
+                          <a:latin typeface="Calibri"/>
+                        </a:rPr>
+                        <a:t>0</a:t>
+                      </a:r>
+                    </a:p>
+                  </a:txBody>
+                  <a:tcPr>
+                    <a:solidFill>
+                      <a:srgbClr val="FFFFFF"/>
+                    </a:solidFill>
+                  </a:tcPr>
+                </a:tc>
+                <a:tc>
+                  <a:txBody>
+                    <a:bodyPr/>
+                    <a:lstStyle/>
+                    <a:p>
+                      <a:pPr algn="l"/>
+                      <a:r>
+                        <a:rPr sz="1000" b="0">
+                          <a:solidFill>
+                            <a:srgbClr val="1D1B43"/>
+                          </a:solidFill>
+                          <a:latin typeface="Calibri"/>
+                        </a:rPr>
+                        <a:t>67.6%</a:t>
                       </a:r>
                     </a:p>
                   </a:txBody>
@@ -5000,7 +5000,7 @@
               <a:tr h="438912">
                 <a:tc>
                   <a:txBody>
-                    <a:bodyPr wrap="square"/>
+                    <a:bodyPr/>
                     <a:lstStyle/>
                     <a:p>
                       <a:pPr algn="l"/>
@@ -5023,7 +5023,7 @@
                 </a:tc>
                 <a:tc>
                   <a:txBody>
-                    <a:bodyPr wrap="square"/>
+                    <a:bodyPr/>
                     <a:lstStyle/>
                     <a:p>
                       <a:pPr algn="l"/>
@@ -5046,18 +5046,18 @@
                 </a:tc>
                 <a:tc>
                   <a:txBody>
-                    <a:bodyPr wrap="square"/>
-                    <a:lstStyle/>
-                    <a:p>
-                      <a:pPr algn="l"/>
-                      <a:r>
-                        <a:rPr sz="1000" b="0">
-                          <a:solidFill>
-                            <a:srgbClr val="1D1B43"/>
-                          </a:solidFill>
-                          <a:latin typeface="Calibri"/>
-                        </a:rPr>
-                        <a:t>22</a:t>
+                    <a:bodyPr/>
+                    <a:lstStyle/>
+                    <a:p>
+                      <a:pPr algn="l"/>
+                      <a:r>
+                        <a:rPr sz="1000" b="0">
+                          <a:solidFill>
+                            <a:srgbClr val="1D1B43"/>
+                          </a:solidFill>
+                          <a:latin typeface="Calibri"/>
+                        </a:rPr>
+                        <a:t>23</a:t>
                       </a:r>
                     </a:p>
                   </a:txBody>
@@ -5069,18 +5069,18 @@
                 </a:tc>
                 <a:tc>
                   <a:txBody>
-                    <a:bodyPr wrap="square"/>
-                    <a:lstStyle/>
-                    <a:p>
-                      <a:pPr algn="l"/>
-                      <a:r>
-                        <a:rPr sz="1000" b="0">
-                          <a:solidFill>
-                            <a:srgbClr val="1D1B43"/>
-                          </a:solidFill>
-                          <a:latin typeface="Calibri"/>
-                        </a:rPr>
-                        <a:t>12</a:t>
+                    <a:bodyPr/>
+                    <a:lstStyle/>
+                    <a:p>
+                      <a:pPr algn="l"/>
+                      <a:r>
+                        <a:rPr sz="1000" b="0">
+                          <a:solidFill>
+                            <a:srgbClr val="1D1B43"/>
+                          </a:solidFill>
+                          <a:latin typeface="Calibri"/>
+                        </a:rPr>
+                        <a:t>11</a:t>
                       </a:r>
                     </a:p>
                   </a:txBody>
@@ -5092,18 +5092,18 @@
                 </a:tc>
                 <a:tc>
                   <a:txBody>
-                    <a:bodyPr wrap="square"/>
-                    <a:lstStyle/>
-                    <a:p>
-                      <a:pPr algn="l"/>
-                      <a:r>
-                        <a:rPr sz="1000" b="0">
-                          <a:solidFill>
-                            <a:srgbClr val="1D1B43"/>
-                          </a:solidFill>
-                          <a:latin typeface="Calibri"/>
-                        </a:rPr>
-                        <a:t>64.7%</a:t>
+                    <a:bodyPr/>
+                    <a:lstStyle/>
+                    <a:p>
+                      <a:pPr algn="l"/>
+                      <a:r>
+                        <a:rPr sz="1000" b="0">
+                          <a:solidFill>
+                            <a:srgbClr val="1D1B43"/>
+                          </a:solidFill>
+                          <a:latin typeface="Calibri"/>
+                        </a:rPr>
+                        <a:t>67.6%</a:t>
                       </a:r>
                     </a:p>
                   </a:txBody>
@@ -5191,7 +5191,7 @@
                 </a:solidFill>
                 <a:latin typeface="Calibri"/>
               </a:rPr>
-              <a:t>PERFORMANCE: 64.7% - ATENCAO</a:t>
+              <a:t>PERFORMANCE: 67.6% - ATENCAO</a:t>
             </a:r>
           </a:p>
         </p:txBody>
@@ -5276,7 +5276,7 @@
                 </a:solidFill>
                 <a:latin typeface="Calibri"/>
               </a:rPr>
-              <a:t>OCORRENCIAS FORA DO PRAZO (12)</a:t>
+              <a:t>OCORRENCIAS FORA DO PRAZO (11)</a:t>
             </a:r>
           </a:p>
         </p:txBody>
@@ -5334,7 +5334,7 @@
         </p:nvGraphicFramePr>
         <p:xfrm>
           <a:off x="457200" y="1828800"/>
-          <a:ext cx="11429999" cy="4571996"/>
+          <a:ext cx="11429999" cy="4572000"/>
         </p:xfrm>
         <a:graphic>
           <a:graphicData uri="http://schemas.openxmlformats.org/drawingml/2006/table">
@@ -5349,10 +5349,10 @@
                 <a:gridCol w="1554480"/>
                 <a:gridCol w="2743200"/>
               </a:tblGrid>
-              <a:tr h="351692">
-                <a:tc>
-                  <a:txBody>
-                    <a:bodyPr wrap="square"/>
+              <a:tr h="381000">
+                <a:tc>
+                  <a:txBody>
+                    <a:bodyPr/>
                     <a:lstStyle/>
                     <a:p>
                       <a:pPr algn="ctr"/>
@@ -5375,7 +5375,7 @@
                 </a:tc>
                 <a:tc>
                   <a:txBody>
-                    <a:bodyPr wrap="square"/>
+                    <a:bodyPr/>
                     <a:lstStyle/>
                     <a:p>
                       <a:pPr algn="ctr"/>
@@ -5398,7 +5398,7 @@
                 </a:tc>
                 <a:tc>
                   <a:txBody>
-                    <a:bodyPr wrap="square"/>
+                    <a:bodyPr/>
                     <a:lstStyle/>
                     <a:p>
                       <a:pPr algn="ctr"/>
@@ -5421,7 +5421,7 @@
                 </a:tc>
                 <a:tc>
                   <a:txBody>
-                    <a:bodyPr wrap="square"/>
+                    <a:bodyPr/>
                     <a:lstStyle/>
                     <a:p>
                       <a:pPr algn="ctr"/>
@@ -5444,7 +5444,7 @@
                 </a:tc>
                 <a:tc>
                   <a:txBody>
-                    <a:bodyPr wrap="square"/>
+                    <a:bodyPr/>
                     <a:lstStyle/>
                     <a:p>
                       <a:pPr algn="ctr"/>
@@ -5466,10 +5466,10 @@
                   </a:tcPr>
                 </a:tc>
               </a:tr>
-              <a:tr h="351692">
-                <a:tc>
-                  <a:txBody>
-                    <a:bodyPr wrap="square"/>
+              <a:tr h="381000">
+                <a:tc>
+                  <a:txBody>
+                    <a:bodyPr/>
                     <a:lstStyle/>
                     <a:p>
                       <a:pPr algn="l"/>
@@ -5492,7 +5492,7 @@
                 </a:tc>
                 <a:tc>
                   <a:txBody>
-                    <a:bodyPr wrap="square"/>
+                    <a:bodyPr/>
                     <a:lstStyle/>
                     <a:p>
                       <a:pPr algn="l"/>
@@ -5515,7 +5515,7 @@
                 </a:tc>
                 <a:tc>
                   <a:txBody>
-                    <a:bodyPr wrap="square"/>
+                    <a:bodyPr/>
                     <a:lstStyle/>
                     <a:p>
                       <a:pPr algn="l"/>
@@ -5538,7 +5538,7 @@
                 </a:tc>
                 <a:tc>
                   <a:txBody>
-                    <a:bodyPr wrap="square"/>
+                    <a:bodyPr/>
                     <a:lstStyle/>
                     <a:p>
                       <a:pPr algn="l"/>
@@ -5561,7 +5561,7 @@
                 </a:tc>
                 <a:tc>
                   <a:txBody>
-                    <a:bodyPr wrap="square"/>
+                    <a:bodyPr/>
                     <a:lstStyle/>
                     <a:p>
                       <a:pPr algn="l"/>
@@ -5583,10 +5583,10 @@
                   </a:tcPr>
                 </a:tc>
               </a:tr>
-              <a:tr h="351692">
-                <a:tc>
-                  <a:txBody>
-                    <a:bodyPr wrap="square"/>
+              <a:tr h="381000">
+                <a:tc>
+                  <a:txBody>
+                    <a:bodyPr/>
                     <a:lstStyle/>
                     <a:p>
                       <a:pPr algn="l"/>
@@ -5609,7 +5609,7 @@
                 </a:tc>
                 <a:tc>
                   <a:txBody>
-                    <a:bodyPr wrap="square"/>
+                    <a:bodyPr/>
                     <a:lstStyle/>
                     <a:p>
                       <a:pPr algn="l"/>
@@ -5632,7 +5632,7 @@
                 </a:tc>
                 <a:tc>
                   <a:txBody>
-                    <a:bodyPr wrap="square"/>
+                    <a:bodyPr/>
                     <a:lstStyle/>
                     <a:p>
                       <a:pPr algn="l"/>
@@ -5655,7 +5655,7 @@
                 </a:tc>
                 <a:tc>
                   <a:txBody>
-                    <a:bodyPr wrap="square"/>
+                    <a:bodyPr/>
                     <a:lstStyle/>
                     <a:p>
                       <a:pPr algn="l"/>
@@ -5678,7 +5678,7 @@
                 </a:tc>
                 <a:tc>
                   <a:txBody>
-                    <a:bodyPr wrap="square"/>
+                    <a:bodyPr/>
                     <a:lstStyle/>
                     <a:p>
                       <a:pPr algn="l"/>
@@ -5700,10 +5700,10 @@
                   </a:tcPr>
                 </a:tc>
               </a:tr>
-              <a:tr h="351692">
-                <a:tc>
-                  <a:txBody>
-                    <a:bodyPr wrap="square"/>
+              <a:tr h="381000">
+                <a:tc>
+                  <a:txBody>
+                    <a:bodyPr/>
                     <a:lstStyle/>
                     <a:p>
                       <a:pPr algn="l"/>
@@ -5726,7 +5726,7 @@
                 </a:tc>
                 <a:tc>
                   <a:txBody>
-                    <a:bodyPr wrap="square"/>
+                    <a:bodyPr/>
                     <a:lstStyle/>
                     <a:p>
                       <a:pPr algn="l"/>
@@ -5749,7 +5749,7 @@
                 </a:tc>
                 <a:tc>
                   <a:txBody>
-                    <a:bodyPr wrap="square"/>
+                    <a:bodyPr/>
                     <a:lstStyle/>
                     <a:p>
                       <a:pPr algn="l"/>
@@ -5772,7 +5772,7 @@
                 </a:tc>
                 <a:tc>
                   <a:txBody>
-                    <a:bodyPr wrap="square"/>
+                    <a:bodyPr/>
                     <a:lstStyle/>
                     <a:p>
                       <a:pPr algn="l"/>
@@ -5795,7 +5795,7 @@
                 </a:tc>
                 <a:tc>
                   <a:txBody>
-                    <a:bodyPr wrap="square"/>
+                    <a:bodyPr/>
                     <a:lstStyle/>
                     <a:p>
                       <a:pPr algn="l"/>
@@ -5817,10 +5817,10 @@
                   </a:tcPr>
                 </a:tc>
               </a:tr>
-              <a:tr h="351692">
-                <a:tc>
-                  <a:txBody>
-                    <a:bodyPr wrap="square"/>
+              <a:tr h="381000">
+                <a:tc>
+                  <a:txBody>
+                    <a:bodyPr/>
                     <a:lstStyle/>
                     <a:p>
                       <a:pPr algn="l"/>
@@ -5843,7 +5843,7 @@
                 </a:tc>
                 <a:tc>
                   <a:txBody>
-                    <a:bodyPr wrap="square"/>
+                    <a:bodyPr/>
                     <a:lstStyle/>
                     <a:p>
                       <a:pPr algn="l"/>
@@ -5866,7 +5866,7 @@
                 </a:tc>
                 <a:tc>
                   <a:txBody>
-                    <a:bodyPr wrap="square"/>
+                    <a:bodyPr/>
                     <a:lstStyle/>
                     <a:p>
                       <a:pPr algn="l"/>
@@ -5889,7 +5889,7 @@
                 </a:tc>
                 <a:tc>
                   <a:txBody>
-                    <a:bodyPr wrap="square"/>
+                    <a:bodyPr/>
                     <a:lstStyle/>
                     <a:p>
                       <a:pPr algn="l"/>
@@ -5912,7 +5912,7 @@
                 </a:tc>
                 <a:tc>
                   <a:txBody>
-                    <a:bodyPr wrap="square"/>
+                    <a:bodyPr/>
                     <a:lstStyle/>
                     <a:p>
                       <a:pPr algn="l"/>
@@ -5934,10 +5934,10 @@
                   </a:tcPr>
                 </a:tc>
               </a:tr>
-              <a:tr h="351692">
-                <a:tc>
-                  <a:txBody>
-                    <a:bodyPr wrap="square"/>
+              <a:tr h="381000">
+                <a:tc>
+                  <a:txBody>
+                    <a:bodyPr/>
                     <a:lstStyle/>
                     <a:p>
                       <a:pPr algn="l"/>
@@ -5960,7 +5960,7 @@
                 </a:tc>
                 <a:tc>
                   <a:txBody>
-                    <a:bodyPr wrap="square"/>
+                    <a:bodyPr/>
                     <a:lstStyle/>
                     <a:p>
                       <a:pPr algn="l"/>
@@ -5983,7 +5983,7 @@
                 </a:tc>
                 <a:tc>
                   <a:txBody>
-                    <a:bodyPr wrap="square"/>
+                    <a:bodyPr/>
                     <a:lstStyle/>
                     <a:p>
                       <a:pPr algn="l"/>
@@ -6006,7 +6006,7 @@
                 </a:tc>
                 <a:tc>
                   <a:txBody>
-                    <a:bodyPr wrap="square"/>
+                    <a:bodyPr/>
                     <a:lstStyle/>
                     <a:p>
                       <a:pPr algn="l"/>
@@ -6029,7 +6029,7 @@
                 </a:tc>
                 <a:tc>
                   <a:txBody>
-                    <a:bodyPr wrap="square"/>
+                    <a:bodyPr/>
                     <a:lstStyle/>
                     <a:p>
                       <a:pPr algn="l"/>
@@ -6051,10 +6051,10 @@
                   </a:tcPr>
                 </a:tc>
               </a:tr>
-              <a:tr h="351692">
-                <a:tc>
-                  <a:txBody>
-                    <a:bodyPr wrap="square"/>
+              <a:tr h="381000">
+                <a:tc>
+                  <a:txBody>
+                    <a:bodyPr/>
                     <a:lstStyle/>
                     <a:p>
                       <a:pPr algn="l"/>
@@ -6077,7 +6077,7 @@
                 </a:tc>
                 <a:tc>
                   <a:txBody>
-                    <a:bodyPr wrap="square"/>
+                    <a:bodyPr/>
                     <a:lstStyle/>
                     <a:p>
                       <a:pPr algn="l"/>
@@ -6100,7 +6100,7 @@
                 </a:tc>
                 <a:tc>
                   <a:txBody>
-                    <a:bodyPr wrap="square"/>
+                    <a:bodyPr/>
                     <a:lstStyle/>
                     <a:p>
                       <a:pPr algn="l"/>
@@ -6123,7 +6123,7 @@
                 </a:tc>
                 <a:tc>
                   <a:txBody>
-                    <a:bodyPr wrap="square"/>
+                    <a:bodyPr/>
                     <a:lstStyle/>
                     <a:p>
                       <a:pPr algn="l"/>
@@ -6146,7 +6146,7 @@
                 </a:tc>
                 <a:tc>
                   <a:txBody>
-                    <a:bodyPr wrap="square"/>
+                    <a:bodyPr/>
                     <a:lstStyle/>
                     <a:p>
                       <a:pPr algn="l"/>
@@ -6168,10 +6168,10 @@
                   </a:tcPr>
                 </a:tc>
               </a:tr>
-              <a:tr h="351692">
-                <a:tc>
-                  <a:txBody>
-                    <a:bodyPr wrap="square"/>
+              <a:tr h="381000">
+                <a:tc>
+                  <a:txBody>
+                    <a:bodyPr/>
                     <a:lstStyle/>
                     <a:p>
                       <a:pPr algn="l"/>
@@ -6194,7 +6194,7 @@
                 </a:tc>
                 <a:tc>
                   <a:txBody>
-                    <a:bodyPr wrap="square"/>
+                    <a:bodyPr/>
                     <a:lstStyle/>
                     <a:p>
                       <a:pPr algn="l"/>
@@ -6217,7 +6217,7 @@
                 </a:tc>
                 <a:tc>
                   <a:txBody>
-                    <a:bodyPr wrap="square"/>
+                    <a:bodyPr/>
                     <a:lstStyle/>
                     <a:p>
                       <a:pPr algn="l"/>
@@ -6240,7 +6240,7 @@
                 </a:tc>
                 <a:tc>
                   <a:txBody>
-                    <a:bodyPr wrap="square"/>
+                    <a:bodyPr/>
                     <a:lstStyle/>
                     <a:p>
                       <a:pPr algn="l"/>
@@ -6263,7 +6263,7 @@
                 </a:tc>
                 <a:tc>
                   <a:txBody>
-                    <a:bodyPr wrap="square"/>
+                    <a:bodyPr/>
                     <a:lstStyle/>
                     <a:p>
                       <a:pPr algn="l"/>
@@ -6285,10 +6285,10 @@
                   </a:tcPr>
                 </a:tc>
               </a:tr>
-              <a:tr h="351692">
-                <a:tc>
-                  <a:txBody>
-                    <a:bodyPr wrap="square"/>
+              <a:tr h="381000">
+                <a:tc>
+                  <a:txBody>
+                    <a:bodyPr/>
                     <a:lstStyle/>
                     <a:p>
                       <a:pPr algn="l"/>
@@ -6311,7 +6311,7 @@
                 </a:tc>
                 <a:tc>
                   <a:txBody>
-                    <a:bodyPr wrap="square"/>
+                    <a:bodyPr/>
                     <a:lstStyle/>
                     <a:p>
                       <a:pPr algn="l"/>
@@ -6334,7 +6334,7 @@
                 </a:tc>
                 <a:tc>
                   <a:txBody>
-                    <a:bodyPr wrap="square"/>
+                    <a:bodyPr/>
                     <a:lstStyle/>
                     <a:p>
                       <a:pPr algn="l"/>
@@ -6357,7 +6357,7 @@
                 </a:tc>
                 <a:tc>
                   <a:txBody>
-                    <a:bodyPr wrap="square"/>
+                    <a:bodyPr/>
                     <a:lstStyle/>
                     <a:p>
                       <a:pPr algn="l"/>
@@ -6380,7 +6380,7 @@
                 </a:tc>
                 <a:tc>
                   <a:txBody>
-                    <a:bodyPr wrap="square"/>
+                    <a:bodyPr/>
                     <a:lstStyle/>
                     <a:p>
                       <a:pPr algn="l"/>
@@ -6402,113 +6402,113 @@
                   </a:tcPr>
                 </a:tc>
               </a:tr>
-              <a:tr h="351692">
-                <a:tc>
-                  <a:txBody>
-                    <a:bodyPr wrap="square"/>
-                    <a:lstStyle/>
-                    <a:p>
-                      <a:pPr algn="l"/>
-                      <a:r>
-                        <a:rPr sz="1000" b="0">
-                          <a:solidFill>
-                            <a:srgbClr val="1D1B43"/>
-                          </a:solidFill>
-                          <a:latin typeface="Calibri"/>
-                        </a:rPr>
-                        <a:t>280335</a:t>
-                      </a:r>
-                    </a:p>
-                  </a:txBody>
-                  <a:tcPr>
-                    <a:solidFill>
-                      <a:srgbClr val="FFFFFF"/>
-                    </a:solidFill>
-                  </a:tcPr>
-                </a:tc>
-                <a:tc>
-                  <a:txBody>
-                    <a:bodyPr wrap="square"/>
-                    <a:lstStyle/>
-                    <a:p>
-                      <a:pPr algn="l"/>
-                      <a:r>
-                        <a:rPr sz="1000" b="0">
-                          <a:solidFill>
-                            <a:srgbClr val="1D1B43"/>
-                          </a:solidFill>
-                          <a:latin typeface="Calibri"/>
-                        </a:rPr>
-                        <a:t>AMAZON SERVICOS DE V - BETIM / MG</a:t>
-                      </a:r>
-                    </a:p>
-                  </a:txBody>
-                  <a:tcPr>
-                    <a:solidFill>
-                      <a:srgbClr val="FFFFFF"/>
-                    </a:solidFill>
-                  </a:tcPr>
-                </a:tc>
-                <a:tc>
-                  <a:txBody>
-                    <a:bodyPr wrap="square"/>
-                    <a:lstStyle/>
-                    <a:p>
-                      <a:pPr algn="l"/>
-                      <a:r>
-                        <a:rPr sz="1000" b="0">
-                          <a:solidFill>
-                            <a:srgbClr val="1D1B43"/>
-                          </a:solidFill>
-                          <a:latin typeface="Calibri"/>
-                        </a:rPr>
-                        <a:t>BETIM/MG</a:t>
-                      </a:r>
-                    </a:p>
-                  </a:txBody>
-                  <a:tcPr>
-                    <a:solidFill>
-                      <a:srgbClr val="FFFFFF"/>
-                    </a:solidFill>
-                  </a:tcPr>
-                </a:tc>
-                <a:tc>
-                  <a:txBody>
-                    <a:bodyPr wrap="square"/>
-                    <a:lstStyle/>
-                    <a:p>
-                      <a:pPr algn="l"/>
-                      <a:r>
-                        <a:rPr sz="1000" b="0">
-                          <a:solidFill>
-                            <a:srgbClr val="1D1B43"/>
-                          </a:solidFill>
-                          <a:latin typeface="Calibri"/>
-                        </a:rPr>
-                        <a:t>29/04/2026</a:t>
-                      </a:r>
-                    </a:p>
-                  </a:txBody>
-                  <a:tcPr>
-                    <a:solidFill>
-                      <a:srgbClr val="FFFFFF"/>
-                    </a:solidFill>
-                  </a:tcPr>
-                </a:tc>
-                <a:tc>
-                  <a:txBody>
-                    <a:bodyPr wrap="square"/>
-                    <a:lstStyle/>
-                    <a:p>
-                      <a:pPr algn="l"/>
-                      <a:r>
-                        <a:rPr sz="1000" b="0">
-                          <a:solidFill>
-                            <a:srgbClr val="1D1B43"/>
-                          </a:solidFill>
-                          <a:latin typeface="Calibri"/>
-                        </a:rPr>
-                        <a:t>FORA DO PRAZO</a:t>
+              <a:tr h="381000">
+                <a:tc>
+                  <a:txBody>
+                    <a:bodyPr/>
+                    <a:lstStyle/>
+                    <a:p>
+                      <a:pPr algn="l"/>
+                      <a:r>
+                        <a:rPr sz="1000" b="0">
+                          <a:solidFill>
+                            <a:srgbClr val="1D1B43"/>
+                          </a:solidFill>
+                          <a:latin typeface="Calibri"/>
+                        </a:rPr>
+                        <a:t>280636</a:t>
+                      </a:r>
+                    </a:p>
+                  </a:txBody>
+                  <a:tcPr>
+                    <a:solidFill>
+                      <a:srgbClr val="FFFFFF"/>
+                    </a:solidFill>
+                  </a:tcPr>
+                </a:tc>
+                <a:tc>
+                  <a:txBody>
+                    <a:bodyPr/>
+                    <a:lstStyle/>
+                    <a:p>
+                      <a:pPr algn="l"/>
+                      <a:r>
+                        <a:rPr sz="1000" b="0">
+                          <a:solidFill>
+                            <a:srgbClr val="1D1B43"/>
+                          </a:solidFill>
+                          <a:latin typeface="Calibri"/>
+                        </a:rPr>
+                        <a:t>AMAZON SERVICOS DE V - CAJAMAR / SP</a:t>
+                      </a:r>
+                    </a:p>
+                  </a:txBody>
+                  <a:tcPr>
+                    <a:solidFill>
+                      <a:srgbClr val="FFFFFF"/>
+                    </a:solidFill>
+                  </a:tcPr>
+                </a:tc>
+                <a:tc>
+                  <a:txBody>
+                    <a:bodyPr/>
+                    <a:lstStyle/>
+                    <a:p>
+                      <a:pPr algn="l"/>
+                      <a:r>
+                        <a:rPr sz="1000" b="0">
+                          <a:solidFill>
+                            <a:srgbClr val="1D1B43"/>
+                          </a:solidFill>
+                          <a:latin typeface="Calibri"/>
+                        </a:rPr>
+                        <a:t>CAJAMAR/SP</a:t>
+                      </a:r>
+                    </a:p>
+                  </a:txBody>
+                  <a:tcPr>
+                    <a:solidFill>
+                      <a:srgbClr val="FFFFFF"/>
+                    </a:solidFill>
+                  </a:tcPr>
+                </a:tc>
+                <a:tc>
+                  <a:txBody>
+                    <a:bodyPr/>
+                    <a:lstStyle/>
+                    <a:p>
+                      <a:pPr algn="l"/>
+                      <a:r>
+                        <a:rPr sz="1000" b="0">
+                          <a:solidFill>
+                            <a:srgbClr val="1D1B43"/>
+                          </a:solidFill>
+                          <a:latin typeface="Calibri"/>
+                        </a:rPr>
+                        <a:t>28/04/2026</a:t>
+                      </a:r>
+                    </a:p>
+                  </a:txBody>
+                  <a:tcPr>
+                    <a:solidFill>
+                      <a:srgbClr val="FFFFFF"/>
+                    </a:solidFill>
+                  </a:tcPr>
+                </a:tc>
+                <a:tc>
+                  <a:txBody>
+                    <a:bodyPr/>
+                    <a:lstStyle/>
+                    <a:p>
+                      <a:pPr algn="l"/>
+                      <a:r>
+                        <a:rPr sz="1000" b="0">
+                          <a:solidFill>
+                            <a:srgbClr val="1D1B43"/>
+                          </a:solidFill>
+                          <a:latin typeface="Calibri"/>
+                        </a:rPr>
+                        <a:t>ENTREGUE FORA DO PRAZO</a:t>
                       </a:r>
                     </a:p>
                   </a:txBody>
@@ -6519,21 +6519,21 @@
                   </a:tcPr>
                 </a:tc>
               </a:tr>
-              <a:tr h="351692">
-                <a:tc>
-                  <a:txBody>
-                    <a:bodyPr wrap="square"/>
-                    <a:lstStyle/>
-                    <a:p>
-                      <a:pPr algn="l"/>
-                      <a:r>
-                        <a:rPr sz="1000" b="0">
-                          <a:solidFill>
-                            <a:srgbClr val="1D1B43"/>
-                          </a:solidFill>
-                          <a:latin typeface="Calibri"/>
-                        </a:rPr>
-                        <a:t>280636</a:t>
+              <a:tr h="381000">
+                <a:tc>
+                  <a:txBody>
+                    <a:bodyPr/>
+                    <a:lstStyle/>
+                    <a:p>
+                      <a:pPr algn="l"/>
+                      <a:r>
+                        <a:rPr sz="1000" b="0">
+                          <a:solidFill>
+                            <a:srgbClr val="1D1B43"/>
+                          </a:solidFill>
+                          <a:latin typeface="Calibri"/>
+                        </a:rPr>
+                        <a:t>281194</a:t>
                       </a:r>
                     </a:p>
                   </a:txBody>
@@ -6545,7 +6545,7 @@
                 </a:tc>
                 <a:tc>
                   <a:txBody>
-                    <a:bodyPr wrap="square"/>
+                    <a:bodyPr/>
                     <a:lstStyle/>
                     <a:p>
                       <a:pPr algn="l"/>
@@ -6568,7 +6568,7 @@
                 </a:tc>
                 <a:tc>
                   <a:txBody>
-                    <a:bodyPr wrap="square"/>
+                    <a:bodyPr/>
                     <a:lstStyle/>
                     <a:p>
                       <a:pPr algn="l"/>
@@ -6591,18 +6591,18 @@
                 </a:tc>
                 <a:tc>
                   <a:txBody>
-                    <a:bodyPr wrap="square"/>
-                    <a:lstStyle/>
-                    <a:p>
-                      <a:pPr algn="l"/>
-                      <a:r>
-                        <a:rPr sz="1000" b="0">
-                          <a:solidFill>
-                            <a:srgbClr val="1D1B43"/>
-                          </a:solidFill>
-                          <a:latin typeface="Calibri"/>
-                        </a:rPr>
-                        <a:t>28/04/2026</a:t>
+                    <a:bodyPr/>
+                    <a:lstStyle/>
+                    <a:p>
+                      <a:pPr algn="l"/>
+                      <a:r>
+                        <a:rPr sz="1000" b="0">
+                          <a:solidFill>
+                            <a:srgbClr val="1D1B43"/>
+                          </a:solidFill>
+                          <a:latin typeface="Calibri"/>
+                        </a:rPr>
+                        <a:t>30/04/2026</a:t>
                       </a:r>
                     </a:p>
                   </a:txBody>
@@ -6614,7 +6614,7 @@
                 </a:tc>
                 <a:tc>
                   <a:txBody>
-                    <a:bodyPr wrap="square"/>
+                    <a:bodyPr/>
                     <a:lstStyle/>
                     <a:p>
                       <a:pPr algn="l"/>
@@ -6636,56 +6636,56 @@
                   </a:tcPr>
                 </a:tc>
               </a:tr>
-              <a:tr h="351692">
-                <a:tc>
-                  <a:txBody>
-                    <a:bodyPr wrap="square"/>
-                    <a:lstStyle/>
-                    <a:p>
-                      <a:pPr algn="l"/>
-                      <a:r>
-                        <a:rPr sz="1000" b="0">
-                          <a:solidFill>
-                            <a:srgbClr val="1D1B43"/>
-                          </a:solidFill>
-                          <a:latin typeface="Calibri"/>
-                        </a:rPr>
-                        <a:t>281194</a:t>
-                      </a:r>
-                    </a:p>
-                  </a:txBody>
-                  <a:tcPr>
-                    <a:solidFill>
-                      <a:srgbClr val="FFFFFF"/>
-                    </a:solidFill>
-                  </a:tcPr>
-                </a:tc>
-                <a:tc>
-                  <a:txBody>
-                    <a:bodyPr wrap="square"/>
-                    <a:lstStyle/>
-                    <a:p>
-                      <a:pPr algn="l"/>
-                      <a:r>
-                        <a:rPr sz="1000" b="0">
-                          <a:solidFill>
-                            <a:srgbClr val="1D1B43"/>
-                          </a:solidFill>
-                          <a:latin typeface="Calibri"/>
-                        </a:rPr>
-                        <a:t>AMAZON SERVICOS DE V - CAJAMAR / SP</a:t>
-                      </a:r>
-                    </a:p>
-                  </a:txBody>
-                  <a:tcPr>
-                    <a:solidFill>
-                      <a:srgbClr val="FFFFFF"/>
-                    </a:solidFill>
-                  </a:tcPr>
-                </a:tc>
-                <a:tc>
-                  <a:txBody>
-                    <a:bodyPr wrap="square"/>
+              <a:tr h="381000">
+                <a:tc>
+                  <a:txBody>
+                    <a:bodyPr/>
+                    <a:lstStyle/>
+                    <a:p>
+                      <a:pPr algn="l"/>
+                      <a:r>
+                        <a:rPr sz="1000" b="0">
+                          <a:solidFill>
+                            <a:srgbClr val="1D1B43"/>
+                          </a:solidFill>
+                          <a:latin typeface="Calibri"/>
+                        </a:rPr>
+                        <a:t>281204</a:t>
+                      </a:r>
+                    </a:p>
+                  </a:txBody>
+                  <a:tcPr>
+                    <a:solidFill>
+                      <a:srgbClr val="FFFFFF"/>
+                    </a:solidFill>
+                  </a:tcPr>
+                </a:tc>
+                <a:tc>
+                  <a:txBody>
+                    <a:bodyPr/>
+                    <a:lstStyle/>
+                    <a:p>
+                      <a:pPr algn="l"/>
+                      <a:r>
+                        <a:rPr sz="1000" b="0">
+                          <a:solidFill>
+                            <a:srgbClr val="1D1B43"/>
+                          </a:solidFill>
+                          <a:latin typeface="Calibri"/>
+                        </a:rPr>
+                        <a:t>AMAZON LOGISTICA DO - CAJAMAR / SP</a:t>
+                      </a:r>
+                    </a:p>
+                  </a:txBody>
+                  <a:tcPr>
+                    <a:solidFill>
+                      <a:srgbClr val="FFFFFF"/>
+                    </a:solidFill>
+                  </a:tcPr>
+                </a:tc>
+                <a:tc>
+                  <a:txBody>
+                    <a:bodyPr/>
                     <a:lstStyle/>
                     <a:p>
                       <a:pPr algn="l"/>
@@ -6708,7 +6708,7 @@
                 </a:tc>
                 <a:tc>
                   <a:txBody>
-                    <a:bodyPr wrap="square"/>
+                    <a:bodyPr/>
                     <a:lstStyle/>
                     <a:p>
                       <a:pPr algn="l"/>
@@ -6731,7 +6731,7 @@
                 </a:tc>
                 <a:tc>
                   <a:txBody>
-                    <a:bodyPr wrap="square"/>
+                    <a:bodyPr/>
                     <a:lstStyle/>
                     <a:p>
                       <a:pPr algn="l"/>
@@ -6749,123 +6749,6 @@
                   <a:tcPr>
                     <a:solidFill>
                       <a:srgbClr val="FFFFFF"/>
-                    </a:solidFill>
-                  </a:tcPr>
-                </a:tc>
-              </a:tr>
-              <a:tr h="351692">
-                <a:tc>
-                  <a:txBody>
-                    <a:bodyPr wrap="square"/>
-                    <a:lstStyle/>
-                    <a:p>
-                      <a:pPr algn="l"/>
-                      <a:r>
-                        <a:rPr sz="1000" b="0">
-                          <a:solidFill>
-                            <a:srgbClr val="1D1B43"/>
-                          </a:solidFill>
-                          <a:latin typeface="Calibri"/>
-                        </a:rPr>
-                        <a:t>281204</a:t>
-                      </a:r>
-                    </a:p>
-                  </a:txBody>
-                  <a:tcPr>
-                    <a:solidFill>
-                      <a:srgbClr val="F2F2F2"/>
-                    </a:solidFill>
-                  </a:tcPr>
-                </a:tc>
-                <a:tc>
-                  <a:txBody>
-                    <a:bodyPr wrap="square"/>
-                    <a:lstStyle/>
-                    <a:p>
-                      <a:pPr algn="l"/>
-                      <a:r>
-                        <a:rPr sz="1000" b="0">
-                          <a:solidFill>
-                            <a:srgbClr val="1D1B43"/>
-                          </a:solidFill>
-                          <a:latin typeface="Calibri"/>
-                        </a:rPr>
-                        <a:t>AMAZON LOGISTICA DO - CAJAMAR / SP</a:t>
-                      </a:r>
-                    </a:p>
-                  </a:txBody>
-                  <a:tcPr>
-                    <a:solidFill>
-                      <a:srgbClr val="F2F2F2"/>
-                    </a:solidFill>
-                  </a:tcPr>
-                </a:tc>
-                <a:tc>
-                  <a:txBody>
-                    <a:bodyPr wrap="square"/>
-                    <a:lstStyle/>
-                    <a:p>
-                      <a:pPr algn="l"/>
-                      <a:r>
-                        <a:rPr sz="1000" b="0">
-                          <a:solidFill>
-                            <a:srgbClr val="1D1B43"/>
-                          </a:solidFill>
-                          <a:latin typeface="Calibri"/>
-                        </a:rPr>
-                        <a:t>CAJAMAR/SP</a:t>
-                      </a:r>
-                    </a:p>
-                  </a:txBody>
-                  <a:tcPr>
-                    <a:solidFill>
-                      <a:srgbClr val="F2F2F2"/>
-                    </a:solidFill>
-                  </a:tcPr>
-                </a:tc>
-                <a:tc>
-                  <a:txBody>
-                    <a:bodyPr wrap="square"/>
-                    <a:lstStyle/>
-                    <a:p>
-                      <a:pPr algn="l"/>
-                      <a:r>
-                        <a:rPr sz="1000" b="0">
-                          <a:solidFill>
-                            <a:srgbClr val="1D1B43"/>
-                          </a:solidFill>
-                          <a:latin typeface="Calibri"/>
-                        </a:rPr>
-                        <a:t>30/04/2026</a:t>
-                      </a:r>
-                    </a:p>
-                  </a:txBody>
-                  <a:tcPr>
-                    <a:solidFill>
-                      <a:srgbClr val="F2F2F2"/>
-                    </a:solidFill>
-                  </a:tcPr>
-                </a:tc>
-                <a:tc>
-                  <a:txBody>
-                    <a:bodyPr wrap="square"/>
-                    <a:lstStyle/>
-                    <a:p>
-                      <a:pPr algn="l"/>
-                      <a:r>
-                        <a:rPr sz="1000" b="0">
-                          <a:solidFill>
-                            <a:srgbClr val="1D1B43"/>
-                          </a:solidFill>
-                          <a:latin typeface="Calibri"/>
-                        </a:rPr>
-                        <a:t>ENTREGUE FORA DO PRAZO</a:t>
-                      </a:r>
-                    </a:p>
-                  </a:txBody>
-                  <a:tcPr>
-                    <a:solidFill>
-                      <a:srgbClr val="F2F2F2"/>
                     </a:solidFill>
                   </a:tcPr>
                 </a:tc>
@@ -7031,7 +6914,7 @@
               <a:tr h="399010">
                 <a:tc>
                   <a:txBody>
-                    <a:bodyPr wrap="square"/>
+                    <a:bodyPr/>
                     <a:lstStyle/>
                     <a:p>
                       <a:pPr algn="ctr"/>
@@ -7054,7 +6937,7 @@
                 </a:tc>
                 <a:tc>
                   <a:txBody>
-                    <a:bodyPr wrap="square"/>
+                    <a:bodyPr/>
                     <a:lstStyle/>
                     <a:p>
                       <a:pPr algn="ctr"/>
@@ -7077,7 +6960,7 @@
                 </a:tc>
                 <a:tc>
                   <a:txBody>
-                    <a:bodyPr wrap="square"/>
+                    <a:bodyPr/>
                     <a:lstStyle/>
                     <a:p>
                       <a:pPr algn="ctr"/>
@@ -7100,7 +6983,7 @@
                 </a:tc>
                 <a:tc>
                   <a:txBody>
-                    <a:bodyPr wrap="square"/>
+                    <a:bodyPr/>
                     <a:lstStyle/>
                     <a:p>
                       <a:pPr algn="ctr"/>
@@ -7123,7 +7006,7 @@
                 </a:tc>
                 <a:tc>
                   <a:txBody>
-                    <a:bodyPr wrap="square"/>
+                    <a:bodyPr/>
                     <a:lstStyle/>
                     <a:p>
                       <a:pPr algn="ctr"/>
@@ -7146,7 +7029,7 @@
                 </a:tc>
                 <a:tc>
                   <a:txBody>
-                    <a:bodyPr wrap="square"/>
+                    <a:bodyPr/>
                     <a:lstStyle/>
                     <a:p>
                       <a:pPr algn="ctr"/>
@@ -7171,7 +7054,7 @@
               <a:tr h="399010">
                 <a:tc>
                   <a:txBody>
-                    <a:bodyPr wrap="square"/>
+                    <a:bodyPr/>
                     <a:lstStyle/>
                     <a:p>
                       <a:pPr algn="l"/>
@@ -7194,7 +7077,7 @@
                 </a:tc>
                 <a:tc>
                   <a:txBody>
-                    <a:bodyPr wrap="square"/>
+                    <a:bodyPr/>
                     <a:lstStyle/>
                     <a:p>
                       <a:pPr algn="l"/>
@@ -7217,7 +7100,7 @@
                 </a:tc>
                 <a:tc>
                   <a:txBody>
-                    <a:bodyPr wrap="square"/>
+                    <a:bodyPr/>
                     <a:lstStyle/>
                     <a:p>
                       <a:pPr algn="l"/>
@@ -7240,7 +7123,7 @@
                 </a:tc>
                 <a:tc>
                   <a:txBody>
-                    <a:bodyPr wrap="square"/>
+                    <a:bodyPr/>
                     <a:lstStyle/>
                     <a:p>
                       <a:pPr algn="l"/>
@@ -7263,7 +7146,7 @@
                 </a:tc>
                 <a:tc>
                   <a:txBody>
-                    <a:bodyPr wrap="square"/>
+                    <a:bodyPr/>
                     <a:lstStyle/>
                     <a:p>
                       <a:pPr algn="l"/>
@@ -7286,7 +7169,7 @@
                 </a:tc>
                 <a:tc>
                   <a:txBody>
-                    <a:bodyPr wrap="square"/>
+                    <a:bodyPr/>
                     <a:lstStyle/>
                     <a:p>
                       <a:pPr algn="l"/>
@@ -7311,7 +7194,7 @@
               <a:tr h="399010">
                 <a:tc>
                   <a:txBody>
-                    <a:bodyPr wrap="square"/>
+                    <a:bodyPr/>
                     <a:lstStyle/>
                     <a:p>
                       <a:pPr algn="l"/>
@@ -7334,7 +7217,7 @@
                 </a:tc>
                 <a:tc>
                   <a:txBody>
-                    <a:bodyPr wrap="square"/>
+                    <a:bodyPr/>
                     <a:lstStyle/>
                     <a:p>
                       <a:pPr algn="l"/>
@@ -7357,7 +7240,7 @@
                 </a:tc>
                 <a:tc>
                   <a:txBody>
-                    <a:bodyPr wrap="square"/>
+                    <a:bodyPr/>
                     <a:lstStyle/>
                     <a:p>
                       <a:pPr algn="l"/>
@@ -7380,7 +7263,7 @@
                 </a:tc>
                 <a:tc>
                   <a:txBody>
-                    <a:bodyPr wrap="square"/>
+                    <a:bodyPr/>
                     <a:lstStyle/>
                     <a:p>
                       <a:pPr algn="l"/>
@@ -7403,7 +7286,7 @@
                 </a:tc>
                 <a:tc>
                   <a:txBody>
-                    <a:bodyPr wrap="square"/>
+                    <a:bodyPr/>
                     <a:lstStyle/>
                     <a:p>
                       <a:pPr algn="l"/>
@@ -7426,7 +7309,7 @@
                 </a:tc>
                 <a:tc>
                   <a:txBody>
-                    <a:bodyPr wrap="square"/>
+                    <a:bodyPr/>
                     <a:lstStyle/>
                     <a:p>
                       <a:pPr algn="l"/>
@@ -7451,7 +7334,7 @@
               <a:tr h="399010">
                 <a:tc>
                   <a:txBody>
-                    <a:bodyPr wrap="square"/>
+                    <a:bodyPr/>
                     <a:lstStyle/>
                     <a:p>
                       <a:pPr algn="l"/>
@@ -7474,7 +7357,7 @@
                 </a:tc>
                 <a:tc>
                   <a:txBody>
-                    <a:bodyPr wrap="square"/>
+                    <a:bodyPr/>
                     <a:lstStyle/>
                     <a:p>
                       <a:pPr algn="l"/>
@@ -7497,7 +7380,7 @@
                 </a:tc>
                 <a:tc>
                   <a:txBody>
-                    <a:bodyPr wrap="square"/>
+                    <a:bodyPr/>
                     <a:lstStyle/>
                     <a:p>
                       <a:pPr algn="l"/>
@@ -7520,7 +7403,7 @@
                 </a:tc>
                 <a:tc>
                   <a:txBody>
-                    <a:bodyPr wrap="square"/>
+                    <a:bodyPr/>
                     <a:lstStyle/>
                     <a:p>
                       <a:pPr algn="l"/>
@@ -7543,7 +7426,7 @@
                 </a:tc>
                 <a:tc>
                   <a:txBody>
-                    <a:bodyPr wrap="square"/>
+                    <a:bodyPr/>
                     <a:lstStyle/>
                     <a:p>
                       <a:pPr algn="l"/>
@@ -7566,7 +7449,7 @@
                 </a:tc>
                 <a:tc>
                   <a:txBody>
-                    <a:bodyPr wrap="square"/>
+                    <a:bodyPr/>
                     <a:lstStyle/>
                     <a:p>
                       <a:pPr algn="l"/>
@@ -7591,7 +7474,7 @@
               <a:tr h="399010">
                 <a:tc>
                   <a:txBody>
-                    <a:bodyPr wrap="square"/>
+                    <a:bodyPr/>
                     <a:lstStyle/>
                     <a:p>
                       <a:pPr algn="l"/>
@@ -7614,7 +7497,7 @@
                 </a:tc>
                 <a:tc>
                   <a:txBody>
-                    <a:bodyPr wrap="square"/>
+                    <a:bodyPr/>
                     <a:lstStyle/>
                     <a:p>
                       <a:pPr algn="l"/>
@@ -7637,18 +7520,18 @@
                 </a:tc>
                 <a:tc>
                   <a:txBody>
-                    <a:bodyPr wrap="square"/>
-                    <a:lstStyle/>
-                    <a:p>
-                      <a:pPr algn="l"/>
-                      <a:r>
-                        <a:rPr sz="1000" b="0">
-                          <a:solidFill>
-                            <a:srgbClr val="1D1B43"/>
-                          </a:solidFill>
-                          <a:latin typeface="Calibri"/>
-                        </a:rPr>
-                        <a:t>1</a:t>
+                    <a:bodyPr/>
+                    <a:lstStyle/>
+                    <a:p>
+                      <a:pPr algn="l"/>
+                      <a:r>
+                        <a:rPr sz="1000" b="0">
+                          <a:solidFill>
+                            <a:srgbClr val="1D1B43"/>
+                          </a:solidFill>
+                          <a:latin typeface="Calibri"/>
+                        </a:rPr>
+                        <a:t>2</a:t>
                       </a:r>
                     </a:p>
                   </a:txBody>
@@ -7660,18 +7543,18 @@
                 </a:tc>
                 <a:tc>
                   <a:txBody>
-                    <a:bodyPr wrap="square"/>
-                    <a:lstStyle/>
-                    <a:p>
-                      <a:pPr algn="l"/>
-                      <a:r>
-                        <a:rPr sz="1000" b="0">
-                          <a:solidFill>
-                            <a:srgbClr val="1D1B43"/>
-                          </a:solidFill>
-                          <a:latin typeface="Calibri"/>
-                        </a:rPr>
-                        <a:t>1</a:t>
+                    <a:bodyPr/>
+                    <a:lstStyle/>
+                    <a:p>
+                      <a:pPr algn="l"/>
+                      <a:r>
+                        <a:rPr sz="1000" b="0">
+                          <a:solidFill>
+                            <a:srgbClr val="1D1B43"/>
+                          </a:solidFill>
+                          <a:latin typeface="Calibri"/>
+                        </a:rPr>
+                        <a:t>0</a:t>
                       </a:r>
                     </a:p>
                   </a:txBody>
@@ -7683,18 +7566,18 @@
                 </a:tc>
                 <a:tc>
                   <a:txBody>
-                    <a:bodyPr wrap="square"/>
-                    <a:lstStyle/>
-                    <a:p>
-                      <a:pPr algn="l"/>
-                      <a:r>
-                        <a:rPr sz="1000" b="0">
-                          <a:solidFill>
-                            <a:srgbClr val="1D1B43"/>
-                          </a:solidFill>
-                          <a:latin typeface="Calibri"/>
-                        </a:rPr>
-                        <a:t>50.0%</a:t>
+                    <a:bodyPr/>
+                    <a:lstStyle/>
+                    <a:p>
+                      <a:pPr algn="l"/>
+                      <a:r>
+                        <a:rPr sz="1000" b="0">
+                          <a:solidFill>
+                            <a:srgbClr val="1D1B43"/>
+                          </a:solidFill>
+                          <a:latin typeface="Calibri"/>
+                        </a:rPr>
+                        <a:t>100.0%</a:t>
                       </a:r>
                     </a:p>
                   </a:txBody>
@@ -7706,18 +7589,18 @@
                 </a:tc>
                 <a:tc>
                   <a:txBody>
-                    <a:bodyPr wrap="square"/>
-                    <a:lstStyle/>
-                    <a:p>
-                      <a:pPr algn="l"/>
-                      <a:r>
-                        <a:rPr sz="1000" b="0">
-                          <a:solidFill>
-                            <a:srgbClr val="1D1B43"/>
-                          </a:solidFill>
-                          <a:latin typeface="Calibri"/>
-                        </a:rPr>
-                        <a:t>Atencao</a:t>
+                    <a:bodyPr/>
+                    <a:lstStyle/>
+                    <a:p>
+                      <a:pPr algn="l"/>
+                      <a:r>
+                        <a:rPr sz="1000" b="0">
+                          <a:solidFill>
+                            <a:srgbClr val="1D1B43"/>
+                          </a:solidFill>
+                          <a:latin typeface="Calibri"/>
+                        </a:rPr>
+                        <a:t>Excelente</a:t>
                       </a:r>
                     </a:p>
                   </a:txBody>
@@ -7731,7 +7614,7 @@
               <a:tr h="399010">
                 <a:tc>
                   <a:txBody>
-                    <a:bodyPr wrap="square"/>
+                    <a:bodyPr/>
                     <a:lstStyle/>
                     <a:p>
                       <a:pPr algn="l"/>
@@ -7754,7 +7637,7 @@
                 </a:tc>
                 <a:tc>
                   <a:txBody>
-                    <a:bodyPr wrap="square"/>
+                    <a:bodyPr/>
                     <a:lstStyle/>
                     <a:p>
                       <a:pPr algn="l"/>
@@ -7777,7 +7660,7 @@
                 </a:tc>
                 <a:tc>
                   <a:txBody>
-                    <a:bodyPr wrap="square"/>
+                    <a:bodyPr/>
                     <a:lstStyle/>
                     <a:p>
                       <a:pPr algn="l"/>
@@ -7800,7 +7683,7 @@
                 </a:tc>
                 <a:tc>
                   <a:txBody>
-                    <a:bodyPr wrap="square"/>
+                    <a:bodyPr/>
                     <a:lstStyle/>
                     <a:p>
                       <a:pPr algn="l"/>
@@ -7823,7 +7706,7 @@
                 </a:tc>
                 <a:tc>
                   <a:txBody>
-                    <a:bodyPr wrap="square"/>
+                    <a:bodyPr/>
                     <a:lstStyle/>
                     <a:p>
                       <a:pPr algn="l"/>
@@ -7846,7 +7729,7 @@
                 </a:tc>
                 <a:tc>
                   <a:txBody>
-                    <a:bodyPr wrap="square"/>
+                    <a:bodyPr/>
                     <a:lstStyle/>
                     <a:p>
                       <a:pPr algn="l"/>
@@ -7871,7 +7754,7 @@
               <a:tr h="399010">
                 <a:tc>
                   <a:txBody>
-                    <a:bodyPr wrap="square"/>
+                    <a:bodyPr/>
                     <a:lstStyle/>
                     <a:p>
                       <a:pPr algn="l"/>
@@ -7894,7 +7777,7 @@
                 </a:tc>
                 <a:tc>
                   <a:txBody>
-                    <a:bodyPr wrap="square"/>
+                    <a:bodyPr/>
                     <a:lstStyle/>
                     <a:p>
                       <a:pPr algn="l"/>
@@ -7917,7 +7800,7 @@
                 </a:tc>
                 <a:tc>
                   <a:txBody>
-                    <a:bodyPr wrap="square"/>
+                    <a:bodyPr/>
                     <a:lstStyle/>
                     <a:p>
                       <a:pPr algn="l"/>
@@ -7940,7 +7823,7 @@
                 </a:tc>
                 <a:tc>
                   <a:txBody>
-                    <a:bodyPr wrap="square"/>
+                    <a:bodyPr/>
                     <a:lstStyle/>
                     <a:p>
                       <a:pPr algn="l"/>
@@ -7963,7 +7846,7 @@
                 </a:tc>
                 <a:tc>
                   <a:txBody>
-                    <a:bodyPr wrap="square"/>
+                    <a:bodyPr/>
                     <a:lstStyle/>
                     <a:p>
                       <a:pPr algn="l"/>
@@ -7986,7 +7869,7 @@
                 </a:tc>
                 <a:tc>
                   <a:txBody>
-                    <a:bodyPr wrap="square"/>
+                    <a:bodyPr/>
                     <a:lstStyle/>
                     <a:p>
                       <a:pPr algn="l"/>
@@ -8011,7 +7894,7 @@
               <a:tr h="399010">
                 <a:tc>
                   <a:txBody>
-                    <a:bodyPr wrap="square"/>
+                    <a:bodyPr/>
                     <a:lstStyle/>
                     <a:p>
                       <a:pPr algn="l"/>
@@ -8034,7 +7917,7 @@
                 </a:tc>
                 <a:tc>
                   <a:txBody>
-                    <a:bodyPr wrap="square"/>
+                    <a:bodyPr/>
                     <a:lstStyle/>
                     <a:p>
                       <a:pPr algn="l"/>
@@ -8057,7 +7940,7 @@
                 </a:tc>
                 <a:tc>
                   <a:txBody>
-                    <a:bodyPr wrap="square"/>
+                    <a:bodyPr/>
                     <a:lstStyle/>
                     <a:p>
                       <a:pPr algn="l"/>
@@ -8080,7 +7963,7 @@
                 </a:tc>
                 <a:tc>
                   <a:txBody>
-                    <a:bodyPr wrap="square"/>
+                    <a:bodyPr/>
                     <a:lstStyle/>
                     <a:p>
                       <a:pPr algn="l"/>
@@ -8103,7 +7986,7 @@
                 </a:tc>
                 <a:tc>
                   <a:txBody>
-                    <a:bodyPr wrap="square"/>
+                    <a:bodyPr/>
                     <a:lstStyle/>
                     <a:p>
                       <a:pPr algn="l"/>
@@ -8126,7 +8009,7 @@
                 </a:tc>
                 <a:tc>
                   <a:txBody>
-                    <a:bodyPr wrap="square"/>
+                    <a:bodyPr/>
                     <a:lstStyle/>
                     <a:p>
                       <a:pPr algn="l"/>
@@ -8151,7 +8034,7 @@
               <a:tr h="399010">
                 <a:tc>
                   <a:txBody>
-                    <a:bodyPr wrap="square"/>
+                    <a:bodyPr/>
                     <a:lstStyle/>
                     <a:p>
                       <a:pPr algn="l"/>
@@ -8174,7 +8057,7 @@
                 </a:tc>
                 <a:tc>
                   <a:txBody>
-                    <a:bodyPr wrap="square"/>
+                    <a:bodyPr/>
                     <a:lstStyle/>
                     <a:p>
                       <a:pPr algn="l"/>
@@ -8197,7 +8080,7 @@
                 </a:tc>
                 <a:tc>
                   <a:txBody>
-                    <a:bodyPr wrap="square"/>
+                    <a:bodyPr/>
                     <a:lstStyle/>
                     <a:p>
                       <a:pPr algn="l"/>
@@ -8220,7 +8103,7 @@
                 </a:tc>
                 <a:tc>
                   <a:txBody>
-                    <a:bodyPr wrap="square"/>
+                    <a:bodyPr/>
                     <a:lstStyle/>
                     <a:p>
                       <a:pPr algn="l"/>
@@ -8243,7 +8126,7 @@
                 </a:tc>
                 <a:tc>
                   <a:txBody>
-                    <a:bodyPr wrap="square"/>
+                    <a:bodyPr/>
                     <a:lstStyle/>
                     <a:p>
                       <a:pPr algn="l"/>
@@ -8266,7 +8149,7 @@
                 </a:tc>
                 <a:tc>
                   <a:txBody>
-                    <a:bodyPr wrap="square"/>
+                    <a:bodyPr/>
                     <a:lstStyle/>
                     <a:p>
                       <a:pPr algn="l"/>
@@ -8291,7 +8174,7 @@
               <a:tr h="399010">
                 <a:tc>
                   <a:txBody>
-                    <a:bodyPr wrap="square"/>
+                    <a:bodyPr/>
                     <a:lstStyle/>
                     <a:p>
                       <a:pPr algn="l"/>
@@ -8314,7 +8197,7 @@
                 </a:tc>
                 <a:tc>
                   <a:txBody>
-                    <a:bodyPr wrap="square"/>
+                    <a:bodyPr/>
                     <a:lstStyle/>
                     <a:p>
                       <a:pPr algn="l"/>
@@ -8337,7 +8220,7 @@
                 </a:tc>
                 <a:tc>
                   <a:txBody>
-                    <a:bodyPr wrap="square"/>
+                    <a:bodyPr/>
                     <a:lstStyle/>
                     <a:p>
                       <a:pPr algn="l"/>
@@ -8360,7 +8243,7 @@
                 </a:tc>
                 <a:tc>
                   <a:txBody>
-                    <a:bodyPr wrap="square"/>
+                    <a:bodyPr/>
                     <a:lstStyle/>
                     <a:p>
                       <a:pPr algn="l"/>
@@ -8383,7 +8266,7 @@
                 </a:tc>
                 <a:tc>
                   <a:txBody>
-                    <a:bodyPr wrap="square"/>
+                    <a:bodyPr/>
                     <a:lstStyle/>
                     <a:p>
                       <a:pPr algn="l"/>
@@ -8406,7 +8289,7 @@
                 </a:tc>
                 <a:tc>
                   <a:txBody>
-                    <a:bodyPr wrap="square"/>
+                    <a:bodyPr/>
                     <a:lstStyle/>
                     <a:p>
                       <a:pPr algn="l"/>
@@ -8431,7 +8314,7 @@
               <a:tr h="399010">
                 <a:tc>
                   <a:txBody>
-                    <a:bodyPr wrap="square"/>
+                    <a:bodyPr/>
                     <a:lstStyle/>
                     <a:p>
                       <a:pPr algn="l"/>
@@ -8454,7 +8337,7 @@
                 </a:tc>
                 <a:tc>
                   <a:txBody>
-                    <a:bodyPr wrap="square"/>
+                    <a:bodyPr/>
                     <a:lstStyle/>
                     <a:p>
                       <a:pPr algn="l"/>
@@ -8477,7 +8360,7 @@
                 </a:tc>
                 <a:tc>
                   <a:txBody>
-                    <a:bodyPr wrap="square"/>
+                    <a:bodyPr/>
                     <a:lstStyle/>
                     <a:p>
                       <a:pPr algn="l"/>
@@ -8500,7 +8383,7 @@
                 </a:tc>
                 <a:tc>
                   <a:txBody>
-                    <a:bodyPr wrap="square"/>
+                    <a:bodyPr/>
                     <a:lstStyle/>
                     <a:p>
                       <a:pPr algn="l"/>
@@ -8523,7 +8406,7 @@
                 </a:tc>
                 <a:tc>
                   <a:txBody>
-                    <a:bodyPr wrap="square"/>
+                    <a:bodyPr/>
                     <a:lstStyle/>
                     <a:p>
                       <a:pPr algn="l"/>
@@ -8546,7 +8429,7 @@
                 </a:tc>
                 <a:tc>
                   <a:txBody>
-                    <a:bodyPr wrap="square"/>
+                    <a:bodyPr/>
                     <a:lstStyle/>
                     <a:p>
                       <a:pPr algn="l"/>
@@ -8730,7 +8613,7 @@
               <a:tr h="292608">
                 <a:tc>
                   <a:txBody>
-                    <a:bodyPr wrap="square"/>
+                    <a:bodyPr/>
                     <a:lstStyle/>
                     <a:p>
                       <a:pPr algn="ctr"/>
@@ -8753,7 +8636,7 @@
                 </a:tc>
                 <a:tc>
                   <a:txBody>
-                    <a:bodyPr wrap="square"/>
+                    <a:bodyPr/>
                     <a:lstStyle/>
                     <a:p>
                       <a:pPr algn="ctr"/>
@@ -8776,7 +8659,7 @@
                 </a:tc>
                 <a:tc>
                   <a:txBody>
-                    <a:bodyPr wrap="square"/>
+                    <a:bodyPr/>
                     <a:lstStyle/>
                     <a:p>
                       <a:pPr algn="ctr"/>
@@ -8799,7 +8682,7 @@
                 </a:tc>
                 <a:tc>
                   <a:txBody>
-                    <a:bodyPr wrap="square"/>
+                    <a:bodyPr/>
                     <a:lstStyle/>
                     <a:p>
                       <a:pPr algn="ctr"/>
@@ -8822,7 +8705,7 @@
                 </a:tc>
                 <a:tc>
                   <a:txBody>
-                    <a:bodyPr wrap="square"/>
+                    <a:bodyPr/>
                     <a:lstStyle/>
                     <a:p>
                       <a:pPr algn="ctr"/>
@@ -8845,7 +8728,7 @@
                 </a:tc>
                 <a:tc>
                   <a:txBody>
-                    <a:bodyPr wrap="square"/>
+                    <a:bodyPr/>
                     <a:lstStyle/>
                     <a:p>
                       <a:pPr algn="ctr"/>
@@ -8868,7 +8751,7 @@
                 </a:tc>
                 <a:tc>
                   <a:txBody>
-                    <a:bodyPr wrap="square"/>
+                    <a:bodyPr/>
                     <a:lstStyle/>
                     <a:p>
                       <a:pPr algn="ctr"/>
@@ -8893,7 +8776,7 @@
               <a:tr h="292608">
                 <a:tc>
                   <a:txBody>
-                    <a:bodyPr wrap="square"/>
+                    <a:bodyPr/>
                     <a:lstStyle/>
                     <a:p>
                       <a:pPr algn="l"/>
@@ -8916,7 +8799,7 @@
                 </a:tc>
                 <a:tc>
                   <a:txBody>
-                    <a:bodyPr wrap="square"/>
+                    <a:bodyPr/>
                     <a:lstStyle/>
                     <a:p>
                       <a:pPr algn="l"/>
@@ -8939,7 +8822,7 @@
                 </a:tc>
                 <a:tc>
                   <a:txBody>
-                    <a:bodyPr wrap="square"/>
+                    <a:bodyPr/>
                     <a:lstStyle/>
                     <a:p>
                       <a:pPr algn="l"/>
@@ -8962,7 +8845,7 @@
                 </a:tc>
                 <a:tc>
                   <a:txBody>
-                    <a:bodyPr wrap="square"/>
+                    <a:bodyPr/>
                     <a:lstStyle/>
                     <a:p>
                       <a:pPr algn="l"/>
@@ -8985,7 +8868,7 @@
                 </a:tc>
                 <a:tc>
                   <a:txBody>
-                    <a:bodyPr wrap="square"/>
+                    <a:bodyPr/>
                     <a:lstStyle/>
                     <a:p>
                       <a:pPr algn="l"/>
@@ -9008,7 +8891,7 @@
                 </a:tc>
                 <a:tc>
                   <a:txBody>
-                    <a:bodyPr wrap="square"/>
+                    <a:bodyPr/>
                     <a:lstStyle/>
                     <a:p>
                       <a:pPr algn="l"/>
@@ -9031,7 +8914,7 @@
                 </a:tc>
                 <a:tc>
                   <a:txBody>
-                    <a:bodyPr wrap="square"/>
+                    <a:bodyPr/>
                     <a:lstStyle/>
                     <a:p>
                       <a:pPr algn="l"/>
@@ -9056,7 +8939,7 @@
               <a:tr h="292608">
                 <a:tc>
                   <a:txBody>
-                    <a:bodyPr wrap="square"/>
+                    <a:bodyPr/>
                     <a:lstStyle/>
                     <a:p>
                       <a:pPr algn="l"/>
@@ -9079,7 +8962,7 @@
                 </a:tc>
                 <a:tc>
                   <a:txBody>
-                    <a:bodyPr wrap="square"/>
+                    <a:bodyPr/>
                     <a:lstStyle/>
                     <a:p>
                       <a:pPr algn="l"/>
@@ -9102,7 +8985,7 @@
                 </a:tc>
                 <a:tc>
                   <a:txBody>
-                    <a:bodyPr wrap="square"/>
+                    <a:bodyPr/>
                     <a:lstStyle/>
                     <a:p>
                       <a:pPr algn="l"/>
@@ -9125,7 +9008,7 @@
                 </a:tc>
                 <a:tc>
                   <a:txBody>
-                    <a:bodyPr wrap="square"/>
+                    <a:bodyPr/>
                     <a:lstStyle/>
                     <a:p>
                       <a:pPr algn="l"/>
@@ -9148,7 +9031,7 @@
                 </a:tc>
                 <a:tc>
                   <a:txBody>
-                    <a:bodyPr wrap="square"/>
+                    <a:bodyPr/>
                     <a:lstStyle/>
                     <a:p>
                       <a:pPr algn="l"/>
@@ -9171,7 +9054,7 @@
                 </a:tc>
                 <a:tc>
                   <a:txBody>
-                    <a:bodyPr wrap="square"/>
+                    <a:bodyPr/>
                     <a:lstStyle/>
                     <a:p>
                       <a:pPr algn="l"/>
@@ -9194,7 +9077,7 @@
                 </a:tc>
                 <a:tc>
                   <a:txBody>
-                    <a:bodyPr wrap="square"/>
+                    <a:bodyPr/>
                     <a:lstStyle/>
                     <a:p>
                       <a:pPr algn="l"/>
@@ -9219,7 +9102,7 @@
               <a:tr h="292608">
                 <a:tc>
                   <a:txBody>
-                    <a:bodyPr wrap="square"/>
+                    <a:bodyPr/>
                     <a:lstStyle/>
                     <a:p>
                       <a:pPr algn="l"/>
@@ -9242,7 +9125,7 @@
                 </a:tc>
                 <a:tc>
                   <a:txBody>
-                    <a:bodyPr wrap="square"/>
+                    <a:bodyPr/>
                     <a:lstStyle/>
                     <a:p>
                       <a:pPr algn="l"/>
@@ -9265,7 +9148,7 @@
                 </a:tc>
                 <a:tc>
                   <a:txBody>
-                    <a:bodyPr wrap="square"/>
+                    <a:bodyPr/>
                     <a:lstStyle/>
                     <a:p>
                       <a:pPr algn="l"/>
@@ -9288,7 +9171,7 @@
                 </a:tc>
                 <a:tc>
                   <a:txBody>
-                    <a:bodyPr wrap="square"/>
+                    <a:bodyPr/>
                     <a:lstStyle/>
                     <a:p>
                       <a:pPr algn="l"/>
@@ -9311,7 +9194,7 @@
                 </a:tc>
                 <a:tc>
                   <a:txBody>
-                    <a:bodyPr wrap="square"/>
+                    <a:bodyPr/>
                     <a:lstStyle/>
                     <a:p>
                       <a:pPr algn="l"/>
@@ -9334,7 +9217,7 @@
                 </a:tc>
                 <a:tc>
                   <a:txBody>
-                    <a:bodyPr wrap="square"/>
+                    <a:bodyPr/>
                     <a:lstStyle/>
                     <a:p>
                       <a:pPr algn="l"/>
@@ -9357,7 +9240,7 @@
                 </a:tc>
                 <a:tc>
                   <a:txBody>
-                    <a:bodyPr wrap="square"/>
+                    <a:bodyPr/>
                     <a:lstStyle/>
                     <a:p>
                       <a:pPr algn="l"/>
@@ -9382,7 +9265,7 @@
               <a:tr h="292608">
                 <a:tc>
                   <a:txBody>
-                    <a:bodyPr wrap="square"/>
+                    <a:bodyPr/>
                     <a:lstStyle/>
                     <a:p>
                       <a:pPr algn="l"/>
@@ -9405,7 +9288,7 @@
                 </a:tc>
                 <a:tc>
                   <a:txBody>
-                    <a:bodyPr wrap="square"/>
+                    <a:bodyPr/>
                     <a:lstStyle/>
                     <a:p>
                       <a:pPr algn="l"/>
@@ -9428,7 +9311,7 @@
                 </a:tc>
                 <a:tc>
                   <a:txBody>
-                    <a:bodyPr wrap="square"/>
+                    <a:bodyPr/>
                     <a:lstStyle/>
                     <a:p>
                       <a:pPr algn="l"/>
@@ -9451,7 +9334,7 @@
                 </a:tc>
                 <a:tc>
                   <a:txBody>
-                    <a:bodyPr wrap="square"/>
+                    <a:bodyPr/>
                     <a:lstStyle/>
                     <a:p>
                       <a:pPr algn="l"/>
@@ -9474,7 +9357,7 @@
                 </a:tc>
                 <a:tc>
                   <a:txBody>
-                    <a:bodyPr wrap="square"/>
+                    <a:bodyPr/>
                     <a:lstStyle/>
                     <a:p>
                       <a:pPr algn="l"/>
@@ -9497,7 +9380,7 @@
                 </a:tc>
                 <a:tc>
                   <a:txBody>
-                    <a:bodyPr wrap="square"/>
+                    <a:bodyPr/>
                     <a:lstStyle/>
                     <a:p>
                       <a:pPr algn="l"/>
@@ -9520,7 +9403,7 @@
                 </a:tc>
                 <a:tc>
                   <a:txBody>
-                    <a:bodyPr wrap="square"/>
+                    <a:bodyPr/>
                     <a:lstStyle/>
                     <a:p>
                       <a:pPr algn="l"/>
@@ -9545,7 +9428,7 @@
               <a:tr h="292608">
                 <a:tc>
                   <a:txBody>
-                    <a:bodyPr wrap="square"/>
+                    <a:bodyPr/>
                     <a:lstStyle/>
                     <a:p>
                       <a:pPr algn="l"/>
@@ -9568,7 +9451,7 @@
                 </a:tc>
                 <a:tc>
                   <a:txBody>
-                    <a:bodyPr wrap="square"/>
+                    <a:bodyPr/>
                     <a:lstStyle/>
                     <a:p>
                       <a:pPr algn="l"/>
@@ -9591,7 +9474,7 @@
                 </a:tc>
                 <a:tc>
                   <a:txBody>
-                    <a:bodyPr wrap="square"/>
+                    <a:bodyPr/>
                     <a:lstStyle/>
                     <a:p>
                       <a:pPr algn="l"/>
@@ -9614,7 +9497,7 @@
                 </a:tc>
                 <a:tc>
                   <a:txBody>
-                    <a:bodyPr wrap="square"/>
+                    <a:bodyPr/>
                     <a:lstStyle/>
                     <a:p>
                       <a:pPr algn="l"/>
@@ -9637,7 +9520,7 @@
                 </a:tc>
                 <a:tc>
                   <a:txBody>
-                    <a:bodyPr wrap="square"/>
+                    <a:bodyPr/>
                     <a:lstStyle/>
                     <a:p>
                       <a:pPr algn="l"/>
@@ -9660,7 +9543,7 @@
                 </a:tc>
                 <a:tc>
                   <a:txBody>
-                    <a:bodyPr wrap="square"/>
+                    <a:bodyPr/>
                     <a:lstStyle/>
                     <a:p>
                       <a:pPr algn="l"/>
@@ -9683,7 +9566,7 @@
                 </a:tc>
                 <a:tc>
                   <a:txBody>
-                    <a:bodyPr wrap="square"/>
+                    <a:bodyPr/>
                     <a:lstStyle/>
                     <a:p>
                       <a:pPr algn="l"/>
@@ -9708,7 +9591,7 @@
               <a:tr h="292608">
                 <a:tc>
                   <a:txBody>
-                    <a:bodyPr wrap="square"/>
+                    <a:bodyPr/>
                     <a:lstStyle/>
                     <a:p>
                       <a:pPr algn="l"/>
@@ -9731,7 +9614,7 @@
                 </a:tc>
                 <a:tc>
                   <a:txBody>
-                    <a:bodyPr wrap="square"/>
+                    <a:bodyPr/>
                     <a:lstStyle/>
                     <a:p>
                       <a:pPr algn="l"/>
@@ -9754,7 +9637,7 @@
                 </a:tc>
                 <a:tc>
                   <a:txBody>
-                    <a:bodyPr wrap="square"/>
+                    <a:bodyPr/>
                     <a:lstStyle/>
                     <a:p>
                       <a:pPr algn="l"/>
@@ -9777,7 +9660,7 @@
                 </a:tc>
                 <a:tc>
                   <a:txBody>
-                    <a:bodyPr wrap="square"/>
+                    <a:bodyPr/>
                     <a:lstStyle/>
                     <a:p>
                       <a:pPr algn="l"/>
@@ -9800,7 +9683,7 @@
                 </a:tc>
                 <a:tc>
                   <a:txBody>
-                    <a:bodyPr wrap="square"/>
+                    <a:bodyPr/>
                     <a:lstStyle/>
                     <a:p>
                       <a:pPr algn="l"/>
@@ -9823,7 +9706,7 @@
                 </a:tc>
                 <a:tc>
                   <a:txBody>
-                    <a:bodyPr wrap="square"/>
+                    <a:bodyPr/>
                     <a:lstStyle/>
                     <a:p>
                       <a:pPr algn="l"/>
@@ -9846,7 +9729,7 @@
                 </a:tc>
                 <a:tc>
                   <a:txBody>
-                    <a:bodyPr wrap="square"/>
+                    <a:bodyPr/>
                     <a:lstStyle/>
                     <a:p>
                       <a:pPr algn="l"/>
@@ -9871,7 +9754,7 @@
               <a:tr h="292608">
                 <a:tc>
                   <a:txBody>
-                    <a:bodyPr wrap="square"/>
+                    <a:bodyPr/>
                     <a:lstStyle/>
                     <a:p>
                       <a:pPr algn="l"/>
@@ -9894,7 +9777,7 @@
                 </a:tc>
                 <a:tc>
                   <a:txBody>
-                    <a:bodyPr wrap="square"/>
+                    <a:bodyPr/>
                     <a:lstStyle/>
                     <a:p>
                       <a:pPr algn="l"/>
@@ -9917,7 +9800,7 @@
                 </a:tc>
                 <a:tc>
                   <a:txBody>
-                    <a:bodyPr wrap="square"/>
+                    <a:bodyPr/>
                     <a:lstStyle/>
                     <a:p>
                       <a:pPr algn="l"/>
@@ -9940,7 +9823,7 @@
                 </a:tc>
                 <a:tc>
                   <a:txBody>
-                    <a:bodyPr wrap="square"/>
+                    <a:bodyPr/>
                     <a:lstStyle/>
                     <a:p>
                       <a:pPr algn="l"/>
@@ -9963,7 +9846,7 @@
                 </a:tc>
                 <a:tc>
                   <a:txBody>
-                    <a:bodyPr wrap="square"/>
+                    <a:bodyPr/>
                     <a:lstStyle/>
                     <a:p>
                       <a:pPr algn="l"/>
@@ -9986,7 +9869,7 @@
                 </a:tc>
                 <a:tc>
                   <a:txBody>
-                    <a:bodyPr wrap="square"/>
+                    <a:bodyPr/>
                     <a:lstStyle/>
                     <a:p>
                       <a:pPr algn="l"/>
@@ -10009,7 +9892,7 @@
                 </a:tc>
                 <a:tc>
                   <a:txBody>
-                    <a:bodyPr wrap="square"/>
+                    <a:bodyPr/>
                     <a:lstStyle/>
                     <a:p>
                       <a:pPr algn="l"/>
@@ -10034,7 +9917,7 @@
               <a:tr h="292608">
                 <a:tc>
                   <a:txBody>
-                    <a:bodyPr wrap="square"/>
+                    <a:bodyPr/>
                     <a:lstStyle/>
                     <a:p>
                       <a:pPr algn="l"/>
@@ -10057,7 +9940,7 @@
                 </a:tc>
                 <a:tc>
                   <a:txBody>
-                    <a:bodyPr wrap="square"/>
+                    <a:bodyPr/>
                     <a:lstStyle/>
                     <a:p>
                       <a:pPr algn="l"/>
@@ -10080,7 +9963,7 @@
                 </a:tc>
                 <a:tc>
                   <a:txBody>
-                    <a:bodyPr wrap="square"/>
+                    <a:bodyPr/>
                     <a:lstStyle/>
                     <a:p>
                       <a:pPr algn="l"/>
@@ -10103,7 +9986,7 @@
                 </a:tc>
                 <a:tc>
                   <a:txBody>
-                    <a:bodyPr wrap="square"/>
+                    <a:bodyPr/>
                     <a:lstStyle/>
                     <a:p>
                       <a:pPr algn="l"/>
@@ -10126,7 +10009,7 @@
                 </a:tc>
                 <a:tc>
                   <a:txBody>
-                    <a:bodyPr wrap="square"/>
+                    <a:bodyPr/>
                     <a:lstStyle/>
                     <a:p>
                       <a:pPr algn="l"/>
@@ -10149,7 +10032,7 @@
                 </a:tc>
                 <a:tc>
                   <a:txBody>
-                    <a:bodyPr wrap="square"/>
+                    <a:bodyPr/>
                     <a:lstStyle/>
                     <a:p>
                       <a:pPr algn="l"/>
@@ -10172,7 +10055,7 @@
                 </a:tc>
                 <a:tc>
                   <a:txBody>
-                    <a:bodyPr wrap="square"/>
+                    <a:bodyPr/>
                     <a:lstStyle/>
                     <a:p>
                       <a:pPr algn="l"/>
@@ -10197,7 +10080,7 @@
               <a:tr h="292608">
                 <a:tc>
                   <a:txBody>
-                    <a:bodyPr wrap="square"/>
+                    <a:bodyPr/>
                     <a:lstStyle/>
                     <a:p>
                       <a:pPr algn="l"/>
@@ -10220,7 +10103,7 @@
                 </a:tc>
                 <a:tc>
                   <a:txBody>
-                    <a:bodyPr wrap="square"/>
+                    <a:bodyPr/>
                     <a:lstStyle/>
                     <a:p>
                       <a:pPr algn="l"/>
@@ -10243,7 +10126,7 @@
                 </a:tc>
                 <a:tc>
                   <a:txBody>
-                    <a:bodyPr wrap="square"/>
+                    <a:bodyPr/>
                     <a:lstStyle/>
                     <a:p>
                       <a:pPr algn="l"/>
@@ -10266,7 +10149,7 @@
                 </a:tc>
                 <a:tc>
                   <a:txBody>
-                    <a:bodyPr wrap="square"/>
+                    <a:bodyPr/>
                     <a:lstStyle/>
                     <a:p>
                       <a:pPr algn="l"/>
@@ -10289,7 +10172,7 @@
                 </a:tc>
                 <a:tc>
                   <a:txBody>
-                    <a:bodyPr wrap="square"/>
+                    <a:bodyPr/>
                     <a:lstStyle/>
                     <a:p>
                       <a:pPr algn="l"/>
@@ -10312,7 +10195,7 @@
                 </a:tc>
                 <a:tc>
                   <a:txBody>
-                    <a:bodyPr wrap="square"/>
+                    <a:bodyPr/>
                     <a:lstStyle/>
                     <a:p>
                       <a:pPr algn="l"/>
@@ -10335,7 +10218,7 @@
                 </a:tc>
                 <a:tc>
                   <a:txBody>
-                    <a:bodyPr wrap="square"/>
+                    <a:bodyPr/>
                     <a:lstStyle/>
                     <a:p>
                       <a:pPr algn="l"/>
@@ -10360,7 +10243,7 @@
               <a:tr h="292608">
                 <a:tc>
                   <a:txBody>
-                    <a:bodyPr wrap="square"/>
+                    <a:bodyPr/>
                     <a:lstStyle/>
                     <a:p>
                       <a:pPr algn="l"/>
@@ -10383,7 +10266,7 @@
                 </a:tc>
                 <a:tc>
                   <a:txBody>
-                    <a:bodyPr wrap="square"/>
+                    <a:bodyPr/>
                     <a:lstStyle/>
                     <a:p>
                       <a:pPr algn="l"/>
@@ -10406,7 +10289,7 @@
                 </a:tc>
                 <a:tc>
                   <a:txBody>
-                    <a:bodyPr wrap="square"/>
+                    <a:bodyPr/>
                     <a:lstStyle/>
                     <a:p>
                       <a:pPr algn="l"/>
@@ -10429,7 +10312,30 @@
                 </a:tc>
                 <a:tc>
                   <a:txBody>
-                    <a:bodyPr wrap="square"/>
+                    <a:bodyPr/>
+                    <a:lstStyle/>
+                    <a:p>
+                      <a:pPr algn="l"/>
+                      <a:r>
+                        <a:rPr sz="1000" b="0">
+                          <a:solidFill>
+                            <a:srgbClr val="1D1B43"/>
+                          </a:solidFill>
+                          <a:latin typeface="Calibri"/>
+                        </a:rPr>
+                        <a:t>1</a:t>
+                      </a:r>
+                    </a:p>
+                  </a:txBody>
+                  <a:tcPr>
+                    <a:solidFill>
+                      <a:srgbClr val="F2F2F2"/>
+                    </a:solidFill>
+                  </a:tcPr>
+                </a:tc>
+                <a:tc>
+                  <a:txBody>
+                    <a:bodyPr/>
                     <a:lstStyle/>
                     <a:p>
                       <a:pPr algn="l"/>
@@ -10452,18 +10358,18 @@
                 </a:tc>
                 <a:tc>
                   <a:txBody>
-                    <a:bodyPr wrap="square"/>
-                    <a:lstStyle/>
-                    <a:p>
-                      <a:pPr algn="l"/>
-                      <a:r>
-                        <a:rPr sz="1000" b="0">
-                          <a:solidFill>
-                            <a:srgbClr val="1D1B43"/>
-                          </a:solidFill>
-                          <a:latin typeface="Calibri"/>
-                        </a:rPr>
-                        <a:t>1</a:t>
+                    <a:bodyPr/>
+                    <a:lstStyle/>
+                    <a:p>
+                      <a:pPr algn="l"/>
+                      <a:r>
+                        <a:rPr sz="1000" b="0">
+                          <a:solidFill>
+                            <a:srgbClr val="1D1B43"/>
+                          </a:solidFill>
+                          <a:latin typeface="Calibri"/>
+                        </a:rPr>
+                        <a:t>100.0%</a:t>
                       </a:r>
                     </a:p>
                   </a:txBody>
@@ -10475,41 +10381,18 @@
                 </a:tc>
                 <a:tc>
                   <a:txBody>
-                    <a:bodyPr wrap="square"/>
-                    <a:lstStyle/>
-                    <a:p>
-                      <a:pPr algn="l"/>
-                      <a:r>
-                        <a:rPr sz="1000" b="0">
-                          <a:solidFill>
-                            <a:srgbClr val="1D1B43"/>
-                          </a:solidFill>
-                          <a:latin typeface="Calibri"/>
-                        </a:rPr>
-                        <a:t>0.0%</a:t>
-                      </a:r>
-                    </a:p>
-                  </a:txBody>
-                  <a:tcPr>
-                    <a:solidFill>
-                      <a:srgbClr val="F2F2F2"/>
-                    </a:solidFill>
-                  </a:tcPr>
-                </a:tc>
-                <a:tc>
-                  <a:txBody>
-                    <a:bodyPr wrap="square"/>
-                    <a:lstStyle/>
-                    <a:p>
-                      <a:pPr algn="l"/>
-                      <a:r>
-                        <a:rPr sz="1000" b="0">
-                          <a:solidFill>
-                            <a:srgbClr val="1D1B43"/>
-                          </a:solidFill>
-                          <a:latin typeface="Calibri"/>
-                        </a:rPr>
-                        <a:t>Atencao</a:t>
+                    <a:bodyPr/>
+                    <a:lstStyle/>
+                    <a:p>
+                      <a:pPr algn="l"/>
+                      <a:r>
+                        <a:rPr sz="1000" b="0">
+                          <a:solidFill>
+                            <a:srgbClr val="1D1B43"/>
+                          </a:solidFill>
+                          <a:latin typeface="Calibri"/>
+                        </a:rPr>
+                        <a:t>Excelente</a:t>
                       </a:r>
                     </a:p>
                   </a:txBody>
@@ -10523,7 +10406,7 @@
               <a:tr h="292608">
                 <a:tc>
                   <a:txBody>
-                    <a:bodyPr wrap="square"/>
+                    <a:bodyPr/>
                     <a:lstStyle/>
                     <a:p>
                       <a:pPr algn="l"/>
@@ -10546,7 +10429,7 @@
                 </a:tc>
                 <a:tc>
                   <a:txBody>
-                    <a:bodyPr wrap="square"/>
+                    <a:bodyPr/>
                     <a:lstStyle/>
                     <a:p>
                       <a:pPr algn="l"/>
@@ -10569,7 +10452,7 @@
                 </a:tc>
                 <a:tc>
                   <a:txBody>
-                    <a:bodyPr wrap="square"/>
+                    <a:bodyPr/>
                     <a:lstStyle/>
                     <a:p>
                       <a:pPr algn="l"/>
@@ -10592,7 +10475,7 @@
                 </a:tc>
                 <a:tc>
                   <a:txBody>
-                    <a:bodyPr wrap="square"/>
+                    <a:bodyPr/>
                     <a:lstStyle/>
                     <a:p>
                       <a:pPr algn="l"/>
@@ -10615,7 +10498,7 @@
                 </a:tc>
                 <a:tc>
                   <a:txBody>
-                    <a:bodyPr wrap="square"/>
+                    <a:bodyPr/>
                     <a:lstStyle/>
                     <a:p>
                       <a:pPr algn="l"/>
@@ -10638,7 +10521,7 @@
                 </a:tc>
                 <a:tc>
                   <a:txBody>
-                    <a:bodyPr wrap="square"/>
+                    <a:bodyPr/>
                     <a:lstStyle/>
                     <a:p>
                       <a:pPr algn="l"/>
@@ -10661,7 +10544,7 @@
                 </a:tc>
                 <a:tc>
                   <a:txBody>
-                    <a:bodyPr wrap="square"/>
+                    <a:bodyPr/>
                     <a:lstStyle/>
                     <a:p>
                       <a:pPr algn="l"/>
@@ -10686,7 +10569,7 @@
               <a:tr h="292608">
                 <a:tc>
                   <a:txBody>
-                    <a:bodyPr wrap="square"/>
+                    <a:bodyPr/>
                     <a:lstStyle/>
                     <a:p>
                       <a:pPr algn="l"/>
@@ -10709,7 +10592,7 @@
                 </a:tc>
                 <a:tc>
                   <a:txBody>
-                    <a:bodyPr wrap="square"/>
+                    <a:bodyPr/>
                     <a:lstStyle/>
                     <a:p>
                       <a:pPr algn="l"/>
@@ -10732,7 +10615,7 @@
                 </a:tc>
                 <a:tc>
                   <a:txBody>
-                    <a:bodyPr wrap="square"/>
+                    <a:bodyPr/>
                     <a:lstStyle/>
                     <a:p>
                       <a:pPr algn="l"/>
@@ -10755,7 +10638,7 @@
                 </a:tc>
                 <a:tc>
                   <a:txBody>
-                    <a:bodyPr wrap="square"/>
+                    <a:bodyPr/>
                     <a:lstStyle/>
                     <a:p>
                       <a:pPr algn="l"/>
@@ -10778,7 +10661,7 @@
                 </a:tc>
                 <a:tc>
                   <a:txBody>
-                    <a:bodyPr wrap="square"/>
+                    <a:bodyPr/>
                     <a:lstStyle/>
                     <a:p>
                       <a:pPr algn="l"/>
@@ -10801,7 +10684,7 @@
                 </a:tc>
                 <a:tc>
                   <a:txBody>
-                    <a:bodyPr wrap="square"/>
+                    <a:bodyPr/>
                     <a:lstStyle/>
                     <a:p>
                       <a:pPr algn="l"/>
@@ -10824,7 +10707,7 @@
                 </a:tc>
                 <a:tc>
                   <a:txBody>
-                    <a:bodyPr wrap="square"/>
+                    <a:bodyPr/>
                     <a:lstStyle/>
                     <a:p>
                       <a:pPr algn="l"/>
@@ -10849,7 +10732,7 @@
               <a:tr h="292608">
                 <a:tc>
                   <a:txBody>
-                    <a:bodyPr wrap="square"/>
+                    <a:bodyPr/>
                     <a:lstStyle/>
                     <a:p>
                       <a:pPr algn="l"/>
@@ -10872,7 +10755,7 @@
                 </a:tc>
                 <a:tc>
                   <a:txBody>
-                    <a:bodyPr wrap="square"/>
+                    <a:bodyPr/>
                     <a:lstStyle/>
                     <a:p>
                       <a:pPr algn="l"/>
@@ -10895,7 +10778,7 @@
                 </a:tc>
                 <a:tc>
                   <a:txBody>
-                    <a:bodyPr wrap="square"/>
+                    <a:bodyPr/>
                     <a:lstStyle/>
                     <a:p>
                       <a:pPr algn="l"/>
@@ -10918,7 +10801,7 @@
                 </a:tc>
                 <a:tc>
                   <a:txBody>
-                    <a:bodyPr wrap="square"/>
+                    <a:bodyPr/>
                     <a:lstStyle/>
                     <a:p>
                       <a:pPr algn="l"/>
@@ -10941,7 +10824,7 @@
                 </a:tc>
                 <a:tc>
                   <a:txBody>
-                    <a:bodyPr wrap="square"/>
+                    <a:bodyPr/>
                     <a:lstStyle/>
                     <a:p>
                       <a:pPr algn="l"/>
@@ -10964,7 +10847,7 @@
                 </a:tc>
                 <a:tc>
                   <a:txBody>
-                    <a:bodyPr wrap="square"/>
+                    <a:bodyPr/>
                     <a:lstStyle/>
                     <a:p>
                       <a:pPr algn="l"/>
@@ -10987,7 +10870,7 @@
                 </a:tc>
                 <a:tc>
                   <a:txBody>
-                    <a:bodyPr wrap="square"/>
+                    <a:bodyPr/>
                     <a:lstStyle/>
                     <a:p>
                       <a:pPr algn="l"/>
@@ -11012,7 +10895,7 @@
               <a:tr h="292608">
                 <a:tc>
                   <a:txBody>
-                    <a:bodyPr wrap="square"/>
+                    <a:bodyPr/>
                     <a:lstStyle/>
                     <a:p>
                       <a:pPr algn="l"/>
@@ -11035,7 +10918,7 @@
                 </a:tc>
                 <a:tc>
                   <a:txBody>
-                    <a:bodyPr wrap="square"/>
+                    <a:bodyPr/>
                     <a:lstStyle/>
                     <a:p>
                       <a:pPr algn="l"/>
@@ -11058,7 +10941,7 @@
                 </a:tc>
                 <a:tc>
                   <a:txBody>
-                    <a:bodyPr wrap="square"/>
+                    <a:bodyPr/>
                     <a:lstStyle/>
                     <a:p>
                       <a:pPr algn="l"/>
@@ -11081,7 +10964,7 @@
                 </a:tc>
                 <a:tc>
                   <a:txBody>
-                    <a:bodyPr wrap="square"/>
+                    <a:bodyPr/>
                     <a:lstStyle/>
                     <a:p>
                       <a:pPr algn="l"/>
@@ -11104,7 +10987,7 @@
                 </a:tc>
                 <a:tc>
                   <a:txBody>
-                    <a:bodyPr wrap="square"/>
+                    <a:bodyPr/>
                     <a:lstStyle/>
                     <a:p>
                       <a:pPr algn="l"/>
@@ -11127,7 +11010,7 @@
                 </a:tc>
                 <a:tc>
                   <a:txBody>
-                    <a:bodyPr wrap="square"/>
+                    <a:bodyPr/>
                     <a:lstStyle/>
                     <a:p>
                       <a:pPr algn="l"/>
@@ -11150,7 +11033,7 @@
                 </a:tc>
                 <a:tc>
                   <a:txBody>
-                    <a:bodyPr wrap="square"/>
+                    <a:bodyPr/>
                     <a:lstStyle/>
                     <a:p>
                       <a:pPr algn="l"/>

--- a/VENTAPEL_BRASIL_COMERCIAL_IMPO.pptx
+++ b/VENTAPEL_BRASIL_COMERCIAL_IMPO.pptx
@@ -143,13 +143,10 @@
           </c:spPr>
           <c:cat>
             <c:strRef>
-              <c:f>Sheet1!$A$2:$A$3</c:f>
+              <c:f>Sheet1!$A$2:$A$2</c:f>
               <c:strCache>
-                <c:ptCount val="2"/>
+                <c:ptCount val="1"/>
                 <c:pt idx="0">
-                  <c:v>Marco 2026</c:v>
-                </c:pt>
-                <c:pt idx="1">
                   <c:v>Abril 2026</c:v>
                 </c:pt>
               </c:strCache>
@@ -157,15 +154,12 @@
           </c:cat>
           <c:val>
             <c:numRef>
-              <c:f>Sheet1!$B$2:$B$3</c:f>
+              <c:f>Sheet1!$B$2:$B$2</c:f>
               <c:numCache>
                 <c:formatCode>General</c:formatCode>
-                <c:ptCount val="2"/>
+                <c:ptCount val="1"/>
                 <c:pt idx="0">
-                  <c:v>0</c:v>
-                </c:pt>
-                <c:pt idx="1">
-                  <c:v>23</c:v>
+                  <c:v>32</c:v>
                 </c:pt>
               </c:numCache>
             </c:numRef>
@@ -192,13 +186,10 @@
           </c:spPr>
           <c:cat>
             <c:strRef>
-              <c:f>Sheet1!$A$2:$A$3</c:f>
+              <c:f>Sheet1!$A$2:$A$2</c:f>
               <c:strCache>
-                <c:ptCount val="2"/>
+                <c:ptCount val="1"/>
                 <c:pt idx="0">
-                  <c:v>Marco 2026</c:v>
-                </c:pt>
-                <c:pt idx="1">
                   <c:v>Abril 2026</c:v>
                 </c:pt>
               </c:strCache>
@@ -206,15 +197,12 @@
           </c:cat>
           <c:val>
             <c:numRef>
-              <c:f>Sheet1!$C$2:$C$3</c:f>
+              <c:f>Sheet1!$C$2:$C$2</c:f>
               <c:numCache>
                 <c:formatCode>General</c:formatCode>
-                <c:ptCount val="2"/>
+                <c:ptCount val="1"/>
                 <c:pt idx="0">
-                  <c:v>0</c:v>
-                </c:pt>
-                <c:pt idx="1">
-                  <c:v>11</c:v>
+                  <c:v>2</c:v>
                 </c:pt>
               </c:numCache>
             </c:numRef>
@@ -3494,14 +3482,13 @@
           <a:p>
             <a:pPr algn="ctr"/>
             <a:r>
-              <a:rPr sz="1600" b="1">
+              <a:rPr sz="1400" b="1">
                 <a:solidFill>
                   <a:srgbClr val="FFFFFF"/>
                 </a:solidFill>
                 <a:latin typeface="Calibri"/>
               </a:rPr>
-              <a:t>Nossa rota e ir alem das
-entregas!</a:t>
+              <a:t>Nossa rota e ir alem das entregas!</a:t>
             </a:r>
           </a:p>
         </p:txBody>
@@ -3824,7 +3811,7 @@
                 </a:solidFill>
                 <a:latin typeface="Calibri"/>
               </a:rPr>
-              <a:t>23</a:t>
+              <a:t>32</a:t>
             </a:r>
           </a:p>
         </p:txBody>
@@ -3939,7 +3926,7 @@
                 </a:solidFill>
                 <a:latin typeface="Calibri"/>
               </a:rPr>
-              <a:t>11</a:t>
+              <a:t>2</a:t>
             </a:r>
           </a:p>
         </p:txBody>
@@ -4050,11 +4037,11 @@
             <a:r>
               <a:rPr sz="2800" b="1">
                 <a:solidFill>
-                  <a:srgbClr val="EF4444"/>
+                  <a:srgbClr val="F59E0B"/>
                 </a:solidFill>
                 <a:latin typeface="Calibri"/>
               </a:rPr>
-              <a:t>67.6%</a:t>
+              <a:t>94.1%</a:t>
             </a:r>
           </a:p>
         </p:txBody>
@@ -4249,7 +4236,7 @@
                           </a:solidFill>
                           <a:latin typeface="Calibri"/>
                         </a:rPr>
-                        <a:t>0</a:t>
+                        <a:t>-</a:t>
                       </a:r>
                     </a:p>
                   </a:txBody>
@@ -4295,7 +4282,7 @@
                           </a:solidFill>
                           <a:latin typeface="Calibri"/>
                         </a:rPr>
-                        <a:t>+ 34</a:t>
+                        <a:t>-</a:t>
                       </a:r>
                     </a:p>
                   </a:txBody>
@@ -4343,7 +4330,7 @@
                           </a:solidFill>
                           <a:latin typeface="Calibri"/>
                         </a:rPr>
-                        <a:t>0</a:t>
+                        <a:t>-</a:t>
                       </a:r>
                     </a:p>
                   </a:txBody>
@@ -4366,7 +4353,7 @@
                           </a:solidFill>
                           <a:latin typeface="Calibri"/>
                         </a:rPr>
-                        <a:t>23</a:t>
+                        <a:t>32</a:t>
                       </a:r>
                     </a:p>
                   </a:txBody>
@@ -4389,7 +4376,7 @@
                           </a:solidFill>
                           <a:latin typeface="Calibri"/>
                         </a:rPr>
-                        <a:t>+ 23</a:t>
+                        <a:t>-</a:t>
                       </a:r>
                     </a:p>
                   </a:txBody>
@@ -4437,7 +4424,7 @@
                           </a:solidFill>
                           <a:latin typeface="Calibri"/>
                         </a:rPr>
-                        <a:t>0</a:t>
+                        <a:t>-</a:t>
                       </a:r>
                     </a:p>
                   </a:txBody>
@@ -4460,7 +4447,7 @@
                           </a:solidFill>
                           <a:latin typeface="Calibri"/>
                         </a:rPr>
-                        <a:t>11</a:t>
+                        <a:t>2</a:t>
                       </a:r>
                     </a:p>
                   </a:txBody>
@@ -4483,7 +4470,7 @@
                           </a:solidFill>
                           <a:latin typeface="Calibri"/>
                         </a:rPr>
-                        <a:t>+ 11</a:t>
+                        <a:t>-</a:t>
                       </a:r>
                     </a:p>
                   </a:txBody>
@@ -4531,7 +4518,7 @@
                           </a:solidFill>
                           <a:latin typeface="Calibri"/>
                         </a:rPr>
-                        <a:t>67.6%</a:t>
+                        <a:t>-</a:t>
                       </a:r>
                     </a:p>
                   </a:txBody>
@@ -4554,7 +4541,7 @@
                           </a:solidFill>
                           <a:latin typeface="Calibri"/>
                         </a:rPr>
-                        <a:t>67.6%</a:t>
+                        <a:t>94.1%</a:t>
                       </a:r>
                     </a:p>
                   </a:txBody>
@@ -4577,7 +4564,7 @@
                           </a:solidFill>
                           <a:latin typeface="Calibri"/>
                         </a:rPr>
-                        <a:t>+ 0.0pp</a:t>
+                        <a:t>-</a:t>
                       </a:r>
                     </a:p>
                   </a:txBody>
@@ -4748,7 +4735,7 @@
         </p:nvGraphicFramePr>
         <p:xfrm>
           <a:off x="7955279" y="2286000"/>
-          <a:ext cx="4480560" cy="1316736"/>
+          <a:ext cx="4480560" cy="877824"/>
         </p:xfrm>
         <a:graphic>
           <a:graphicData uri="http://schemas.openxmlformats.org/drawingml/2006/table">
@@ -4894,7 +4881,7 @@
                           </a:solidFill>
                           <a:latin typeface="Calibri"/>
                         </a:rPr>
-                        <a:t>Marco 2026</a:t>
+                        <a:t>Abril 2026</a:t>
                       </a:r>
                     </a:p>
                   </a:txBody>
@@ -4917,7 +4904,7 @@
                           </a:solidFill>
                           <a:latin typeface="Calibri"/>
                         </a:rPr>
-                        <a:t>0</a:t>
+                        <a:t>34</a:t>
                       </a:r>
                     </a:p>
                   </a:txBody>
@@ -4940,7 +4927,7 @@
                           </a:solidFill>
                           <a:latin typeface="Calibri"/>
                         </a:rPr>
-                        <a:t>0</a:t>
+                        <a:t>32</a:t>
                       </a:r>
                     </a:p>
                   </a:txBody>
@@ -4963,7 +4950,7 @@
                           </a:solidFill>
                           <a:latin typeface="Calibri"/>
                         </a:rPr>
-                        <a:t>0</a:t>
+                        <a:t>2</a:t>
                       </a:r>
                     </a:p>
                   </a:txBody>
@@ -4986,130 +4973,13 @@
                           </a:solidFill>
                           <a:latin typeface="Calibri"/>
                         </a:rPr>
-                        <a:t>67.6%</a:t>
+                        <a:t>94.1%</a:t>
                       </a:r>
                     </a:p>
                   </a:txBody>
                   <a:tcPr>
                     <a:solidFill>
                       <a:srgbClr val="FFFFFF"/>
-                    </a:solidFill>
-                  </a:tcPr>
-                </a:tc>
-              </a:tr>
-              <a:tr h="438912">
-                <a:tc>
-                  <a:txBody>
-                    <a:bodyPr/>
-                    <a:lstStyle/>
-                    <a:p>
-                      <a:pPr algn="l"/>
-                      <a:r>
-                        <a:rPr sz="1000" b="0">
-                          <a:solidFill>
-                            <a:srgbClr val="1D1B43"/>
-                          </a:solidFill>
-                          <a:latin typeface="Calibri"/>
-                        </a:rPr>
-                        <a:t>Abril 2026</a:t>
-                      </a:r>
-                    </a:p>
-                  </a:txBody>
-                  <a:tcPr>
-                    <a:solidFill>
-                      <a:srgbClr val="F2F2F2"/>
-                    </a:solidFill>
-                  </a:tcPr>
-                </a:tc>
-                <a:tc>
-                  <a:txBody>
-                    <a:bodyPr/>
-                    <a:lstStyle/>
-                    <a:p>
-                      <a:pPr algn="l"/>
-                      <a:r>
-                        <a:rPr sz="1000" b="0">
-                          <a:solidFill>
-                            <a:srgbClr val="1D1B43"/>
-                          </a:solidFill>
-                          <a:latin typeface="Calibri"/>
-                        </a:rPr>
-                        <a:t>34</a:t>
-                      </a:r>
-                    </a:p>
-                  </a:txBody>
-                  <a:tcPr>
-                    <a:solidFill>
-                      <a:srgbClr val="F2F2F2"/>
-                    </a:solidFill>
-                  </a:tcPr>
-                </a:tc>
-                <a:tc>
-                  <a:txBody>
-                    <a:bodyPr/>
-                    <a:lstStyle/>
-                    <a:p>
-                      <a:pPr algn="l"/>
-                      <a:r>
-                        <a:rPr sz="1000" b="0">
-                          <a:solidFill>
-                            <a:srgbClr val="1D1B43"/>
-                          </a:solidFill>
-                          <a:latin typeface="Calibri"/>
-                        </a:rPr>
-                        <a:t>23</a:t>
-                      </a:r>
-                    </a:p>
-                  </a:txBody>
-                  <a:tcPr>
-                    <a:solidFill>
-                      <a:srgbClr val="F2F2F2"/>
-                    </a:solidFill>
-                  </a:tcPr>
-                </a:tc>
-                <a:tc>
-                  <a:txBody>
-                    <a:bodyPr/>
-                    <a:lstStyle/>
-                    <a:p>
-                      <a:pPr algn="l"/>
-                      <a:r>
-                        <a:rPr sz="1000" b="0">
-                          <a:solidFill>
-                            <a:srgbClr val="1D1B43"/>
-                          </a:solidFill>
-                          <a:latin typeface="Calibri"/>
-                        </a:rPr>
-                        <a:t>11</a:t>
-                      </a:r>
-                    </a:p>
-                  </a:txBody>
-                  <a:tcPr>
-                    <a:solidFill>
-                      <a:srgbClr val="F2F2F2"/>
-                    </a:solidFill>
-                  </a:tcPr>
-                </a:tc>
-                <a:tc>
-                  <a:txBody>
-                    <a:bodyPr/>
-                    <a:lstStyle/>
-                    <a:p>
-                      <a:pPr algn="l"/>
-                      <a:r>
-                        <a:rPr sz="1000" b="0">
-                          <a:solidFill>
-                            <a:srgbClr val="1D1B43"/>
-                          </a:solidFill>
-                          <a:latin typeface="Calibri"/>
-                        </a:rPr>
-                        <a:t>67.6%</a:t>
-                      </a:r>
-                    </a:p>
-                  </a:txBody>
-                  <a:tcPr>
-                    <a:solidFill>
-                      <a:srgbClr val="F2F2F2"/>
                     </a:solidFill>
                   </a:tcPr>
                 </a:tc>
@@ -5191,7 +5061,7 @@
                 </a:solidFill>
                 <a:latin typeface="Calibri"/>
               </a:rPr>
-              <a:t>PERFORMANCE: 67.6% - ATENCAO</a:t>
+              <a:t>PERFORMANCE: 94.1% - REGULAR</a:t>
             </a:r>
           </a:p>
         </p:txBody>
@@ -5276,7 +5146,7 @@
                 </a:solidFill>
                 <a:latin typeface="Calibri"/>
               </a:rPr>
-              <a:t>OCORRENCIAS FORA DO PRAZO (11)</a:t>
+              <a:t>OCORRENCIAS FORA DO PRAZO (2)</a:t>
             </a:r>
           </a:p>
         </p:txBody>
@@ -5334,7 +5204,7 @@
         </p:nvGraphicFramePr>
         <p:xfrm>
           <a:off x="457200" y="1828800"/>
-          <a:ext cx="11429999" cy="4572000"/>
+          <a:ext cx="11429999" cy="1152144"/>
         </p:xfrm>
         <a:graphic>
           <a:graphicData uri="http://schemas.openxmlformats.org/drawingml/2006/table">
@@ -5349,7 +5219,7 @@
                 <a:gridCol w="1554480"/>
                 <a:gridCol w="2743200"/>
               </a:tblGrid>
-              <a:tr h="381000">
+              <a:tr h="384048">
                 <a:tc>
                   <a:txBody>
                     <a:bodyPr/>
@@ -5466,21 +5336,21 @@
                   </a:tcPr>
                 </a:tc>
               </a:tr>
-              <a:tr h="381000">
-                <a:tc>
-                  <a:txBody>
-                    <a:bodyPr/>
-                    <a:lstStyle/>
-                    <a:p>
-                      <a:pPr algn="l"/>
-                      <a:r>
-                        <a:rPr sz="1000" b="0">
-                          <a:solidFill>
-                            <a:srgbClr val="1D1B43"/>
-                          </a:solidFill>
-                          <a:latin typeface="Calibri"/>
-                        </a:rPr>
-                        <a:t>277748</a:t>
+              <a:tr h="384048">
+                <a:tc>
+                  <a:txBody>
+                    <a:bodyPr/>
+                    <a:lstStyle/>
+                    <a:p>
+                      <a:pPr algn="l"/>
+                      <a:r>
+                        <a:rPr sz="1000" b="0">
+                          <a:solidFill>
+                            <a:srgbClr val="1D1B43"/>
+                          </a:solidFill>
+                          <a:latin typeface="Calibri"/>
+                        </a:rPr>
+                        <a:t>281194</a:t>
                       </a:r>
                     </a:p>
                   </a:txBody>
@@ -5549,7 +5419,7 @@
                           </a:solidFill>
                           <a:latin typeface="Calibri"/>
                         </a:rPr>
-                        <a:t>03/04/2026</a:t>
+                        <a:t>30/04/2026</a:t>
                       </a:r>
                     </a:p>
                   </a:txBody>
@@ -5583,21 +5453,21 @@
                   </a:tcPr>
                 </a:tc>
               </a:tr>
-              <a:tr h="381000">
-                <a:tc>
-                  <a:txBody>
-                    <a:bodyPr/>
-                    <a:lstStyle/>
-                    <a:p>
-                      <a:pPr algn="l"/>
-                      <a:r>
-                        <a:rPr sz="1000" b="0">
-                          <a:solidFill>
-                            <a:srgbClr val="1D1B43"/>
-                          </a:solidFill>
-                          <a:latin typeface="Calibri"/>
-                        </a:rPr>
-                        <a:t>277749</a:t>
+              <a:tr h="384048">
+                <a:tc>
+                  <a:txBody>
+                    <a:bodyPr/>
+                    <a:lstStyle/>
+                    <a:p>
+                      <a:pPr algn="l"/>
+                      <a:r>
+                        <a:rPr sz="1000" b="0">
+                          <a:solidFill>
+                            <a:srgbClr val="1D1B43"/>
+                          </a:solidFill>
+                          <a:latin typeface="Calibri"/>
+                        </a:rPr>
+                        <a:t>281204</a:t>
                       </a:r>
                     </a:p>
                   </a:txBody>
@@ -5620,7 +5490,7 @@
                           </a:solidFill>
                           <a:latin typeface="Calibri"/>
                         </a:rPr>
-                        <a:t>AMAZON SERVICOS DE V - CAJAMAR / SP</a:t>
+                        <a:t>AMAZON LOGISTICA DO - CAJAMAR / SP</a:t>
                       </a:r>
                     </a:p>
                   </a:txBody>
@@ -5666,7 +5536,7 @@
                           </a:solidFill>
                           <a:latin typeface="Calibri"/>
                         </a:rPr>
-                        <a:t>03/04/2026</a:t>
+                        <a:t>30/04/2026</a:t>
                       </a:r>
                     </a:p>
                   </a:txBody>
@@ -5696,1059 +5566,6 @@
                   <a:tcPr>
                     <a:solidFill>
                       <a:srgbClr val="F2F2F2"/>
-                    </a:solidFill>
-                  </a:tcPr>
-                </a:tc>
-              </a:tr>
-              <a:tr h="381000">
-                <a:tc>
-                  <a:txBody>
-                    <a:bodyPr/>
-                    <a:lstStyle/>
-                    <a:p>
-                      <a:pPr algn="l"/>
-                      <a:r>
-                        <a:rPr sz="1000" b="0">
-                          <a:solidFill>
-                            <a:srgbClr val="1D1B43"/>
-                          </a:solidFill>
-                          <a:latin typeface="Calibri"/>
-                        </a:rPr>
-                        <a:t>278469</a:t>
-                      </a:r>
-                    </a:p>
-                  </a:txBody>
-                  <a:tcPr>
-                    <a:solidFill>
-                      <a:srgbClr val="FFFFFF"/>
-                    </a:solidFill>
-                  </a:tcPr>
-                </a:tc>
-                <a:tc>
-                  <a:txBody>
-                    <a:bodyPr/>
-                    <a:lstStyle/>
-                    <a:p>
-                      <a:pPr algn="l"/>
-                      <a:r>
-                        <a:rPr sz="1000" b="0">
-                          <a:solidFill>
-                            <a:srgbClr val="1D1B43"/>
-                          </a:solidFill>
-                          <a:latin typeface="Calibri"/>
-                        </a:rPr>
-                        <a:t>AMAZON SERVICOS DE V - CAJAMAR / SP</a:t>
-                      </a:r>
-                    </a:p>
-                  </a:txBody>
-                  <a:tcPr>
-                    <a:solidFill>
-                      <a:srgbClr val="FFFFFF"/>
-                    </a:solidFill>
-                  </a:tcPr>
-                </a:tc>
-                <a:tc>
-                  <a:txBody>
-                    <a:bodyPr/>
-                    <a:lstStyle/>
-                    <a:p>
-                      <a:pPr algn="l"/>
-                      <a:r>
-                        <a:rPr sz="1000" b="0">
-                          <a:solidFill>
-                            <a:srgbClr val="1D1B43"/>
-                          </a:solidFill>
-                          <a:latin typeface="Calibri"/>
-                        </a:rPr>
-                        <a:t>CAJAMAR/SP</a:t>
-                      </a:r>
-                    </a:p>
-                  </a:txBody>
-                  <a:tcPr>
-                    <a:solidFill>
-                      <a:srgbClr val="FFFFFF"/>
-                    </a:solidFill>
-                  </a:tcPr>
-                </a:tc>
-                <a:tc>
-                  <a:txBody>
-                    <a:bodyPr/>
-                    <a:lstStyle/>
-                    <a:p>
-                      <a:pPr algn="l"/>
-                      <a:r>
-                        <a:rPr sz="1000" b="0">
-                          <a:solidFill>
-                            <a:srgbClr val="1D1B43"/>
-                          </a:solidFill>
-                          <a:latin typeface="Calibri"/>
-                        </a:rPr>
-                        <a:t>10/04/2026</a:t>
-                      </a:r>
-                    </a:p>
-                  </a:txBody>
-                  <a:tcPr>
-                    <a:solidFill>
-                      <a:srgbClr val="FFFFFF"/>
-                    </a:solidFill>
-                  </a:tcPr>
-                </a:tc>
-                <a:tc>
-                  <a:txBody>
-                    <a:bodyPr/>
-                    <a:lstStyle/>
-                    <a:p>
-                      <a:pPr algn="l"/>
-                      <a:r>
-                        <a:rPr sz="1000" b="0">
-                          <a:solidFill>
-                            <a:srgbClr val="1D1B43"/>
-                          </a:solidFill>
-                          <a:latin typeface="Calibri"/>
-                        </a:rPr>
-                        <a:t>ENTREGUE FORA DO PRAZO</a:t>
-                      </a:r>
-                    </a:p>
-                  </a:txBody>
-                  <a:tcPr>
-                    <a:solidFill>
-                      <a:srgbClr val="FFFFFF"/>
-                    </a:solidFill>
-                  </a:tcPr>
-                </a:tc>
-              </a:tr>
-              <a:tr h="381000">
-                <a:tc>
-                  <a:txBody>
-                    <a:bodyPr/>
-                    <a:lstStyle/>
-                    <a:p>
-                      <a:pPr algn="l"/>
-                      <a:r>
-                        <a:rPr sz="1000" b="0">
-                          <a:solidFill>
-                            <a:srgbClr val="1D1B43"/>
-                          </a:solidFill>
-                          <a:latin typeface="Calibri"/>
-                        </a:rPr>
-                        <a:t>278470</a:t>
-                      </a:r>
-                    </a:p>
-                  </a:txBody>
-                  <a:tcPr>
-                    <a:solidFill>
-                      <a:srgbClr val="F2F2F2"/>
-                    </a:solidFill>
-                  </a:tcPr>
-                </a:tc>
-                <a:tc>
-                  <a:txBody>
-                    <a:bodyPr/>
-                    <a:lstStyle/>
-                    <a:p>
-                      <a:pPr algn="l"/>
-                      <a:r>
-                        <a:rPr sz="1000" b="0">
-                          <a:solidFill>
-                            <a:srgbClr val="1D1B43"/>
-                          </a:solidFill>
-                          <a:latin typeface="Calibri"/>
-                        </a:rPr>
-                        <a:t>AMAZON SERVICOS DE V - CAJAMAR / SP</a:t>
-                      </a:r>
-                    </a:p>
-                  </a:txBody>
-                  <a:tcPr>
-                    <a:solidFill>
-                      <a:srgbClr val="F2F2F2"/>
-                    </a:solidFill>
-                  </a:tcPr>
-                </a:tc>
-                <a:tc>
-                  <a:txBody>
-                    <a:bodyPr/>
-                    <a:lstStyle/>
-                    <a:p>
-                      <a:pPr algn="l"/>
-                      <a:r>
-                        <a:rPr sz="1000" b="0">
-                          <a:solidFill>
-                            <a:srgbClr val="1D1B43"/>
-                          </a:solidFill>
-                          <a:latin typeface="Calibri"/>
-                        </a:rPr>
-                        <a:t>CAJAMAR/SP</a:t>
-                      </a:r>
-                    </a:p>
-                  </a:txBody>
-                  <a:tcPr>
-                    <a:solidFill>
-                      <a:srgbClr val="F2F2F2"/>
-                    </a:solidFill>
-                  </a:tcPr>
-                </a:tc>
-                <a:tc>
-                  <a:txBody>
-                    <a:bodyPr/>
-                    <a:lstStyle/>
-                    <a:p>
-                      <a:pPr algn="l"/>
-                      <a:r>
-                        <a:rPr sz="1000" b="0">
-                          <a:solidFill>
-                            <a:srgbClr val="1D1B43"/>
-                          </a:solidFill>
-                          <a:latin typeface="Calibri"/>
-                        </a:rPr>
-                        <a:t>10/04/2026</a:t>
-                      </a:r>
-                    </a:p>
-                  </a:txBody>
-                  <a:tcPr>
-                    <a:solidFill>
-                      <a:srgbClr val="F2F2F2"/>
-                    </a:solidFill>
-                  </a:tcPr>
-                </a:tc>
-                <a:tc>
-                  <a:txBody>
-                    <a:bodyPr/>
-                    <a:lstStyle/>
-                    <a:p>
-                      <a:pPr algn="l"/>
-                      <a:r>
-                        <a:rPr sz="1000" b="0">
-                          <a:solidFill>
-                            <a:srgbClr val="1D1B43"/>
-                          </a:solidFill>
-                          <a:latin typeface="Calibri"/>
-                        </a:rPr>
-                        <a:t>ENTREGUE FORA DO PRAZO</a:t>
-                      </a:r>
-                    </a:p>
-                  </a:txBody>
-                  <a:tcPr>
-                    <a:solidFill>
-                      <a:srgbClr val="F2F2F2"/>
-                    </a:solidFill>
-                  </a:tcPr>
-                </a:tc>
-              </a:tr>
-              <a:tr h="381000">
-                <a:tc>
-                  <a:txBody>
-                    <a:bodyPr/>
-                    <a:lstStyle/>
-                    <a:p>
-                      <a:pPr algn="l"/>
-                      <a:r>
-                        <a:rPr sz="1000" b="0">
-                          <a:solidFill>
-                            <a:srgbClr val="1D1B43"/>
-                          </a:solidFill>
-                          <a:latin typeface="Calibri"/>
-                        </a:rPr>
-                        <a:t>278471</a:t>
-                      </a:r>
-                    </a:p>
-                  </a:txBody>
-                  <a:tcPr>
-                    <a:solidFill>
-                      <a:srgbClr val="FFFFFF"/>
-                    </a:solidFill>
-                  </a:tcPr>
-                </a:tc>
-                <a:tc>
-                  <a:txBody>
-                    <a:bodyPr/>
-                    <a:lstStyle/>
-                    <a:p>
-                      <a:pPr algn="l"/>
-                      <a:r>
-                        <a:rPr sz="1000" b="0">
-                          <a:solidFill>
-                            <a:srgbClr val="1D1B43"/>
-                          </a:solidFill>
-                          <a:latin typeface="Calibri"/>
-                        </a:rPr>
-                        <a:t>AMAZON LOGISTICA DO - CAJAMAR / SP</a:t>
-                      </a:r>
-                    </a:p>
-                  </a:txBody>
-                  <a:tcPr>
-                    <a:solidFill>
-                      <a:srgbClr val="FFFFFF"/>
-                    </a:solidFill>
-                  </a:tcPr>
-                </a:tc>
-                <a:tc>
-                  <a:txBody>
-                    <a:bodyPr/>
-                    <a:lstStyle/>
-                    <a:p>
-                      <a:pPr algn="l"/>
-                      <a:r>
-                        <a:rPr sz="1000" b="0">
-                          <a:solidFill>
-                            <a:srgbClr val="1D1B43"/>
-                          </a:solidFill>
-                          <a:latin typeface="Calibri"/>
-                        </a:rPr>
-                        <a:t>CAJAMAR/SP</a:t>
-                      </a:r>
-                    </a:p>
-                  </a:txBody>
-                  <a:tcPr>
-                    <a:solidFill>
-                      <a:srgbClr val="FFFFFF"/>
-                    </a:solidFill>
-                  </a:tcPr>
-                </a:tc>
-                <a:tc>
-                  <a:txBody>
-                    <a:bodyPr/>
-                    <a:lstStyle/>
-                    <a:p>
-                      <a:pPr algn="l"/>
-                      <a:r>
-                        <a:rPr sz="1000" b="0">
-                          <a:solidFill>
-                            <a:srgbClr val="1D1B43"/>
-                          </a:solidFill>
-                          <a:latin typeface="Calibri"/>
-                        </a:rPr>
-                        <a:t>10/04/2026</a:t>
-                      </a:r>
-                    </a:p>
-                  </a:txBody>
-                  <a:tcPr>
-                    <a:solidFill>
-                      <a:srgbClr val="FFFFFF"/>
-                    </a:solidFill>
-                  </a:tcPr>
-                </a:tc>
-                <a:tc>
-                  <a:txBody>
-                    <a:bodyPr/>
-                    <a:lstStyle/>
-                    <a:p>
-                      <a:pPr algn="l"/>
-                      <a:r>
-                        <a:rPr sz="1000" b="0">
-                          <a:solidFill>
-                            <a:srgbClr val="1D1B43"/>
-                          </a:solidFill>
-                          <a:latin typeface="Calibri"/>
-                        </a:rPr>
-                        <a:t>ENTREGUE FORA DO PRAZO</a:t>
-                      </a:r>
-                    </a:p>
-                  </a:txBody>
-                  <a:tcPr>
-                    <a:solidFill>
-                      <a:srgbClr val="FFFFFF"/>
-                    </a:solidFill>
-                  </a:tcPr>
-                </a:tc>
-              </a:tr>
-              <a:tr h="381000">
-                <a:tc>
-                  <a:txBody>
-                    <a:bodyPr/>
-                    <a:lstStyle/>
-                    <a:p>
-                      <a:pPr algn="l"/>
-                      <a:r>
-                        <a:rPr sz="1000" b="0">
-                          <a:solidFill>
-                            <a:srgbClr val="1D1B43"/>
-                          </a:solidFill>
-                          <a:latin typeface="Calibri"/>
-                        </a:rPr>
-                        <a:t>278691</a:t>
-                      </a:r>
-                    </a:p>
-                  </a:txBody>
-                  <a:tcPr>
-                    <a:solidFill>
-                      <a:srgbClr val="F2F2F2"/>
-                    </a:solidFill>
-                  </a:tcPr>
-                </a:tc>
-                <a:tc>
-                  <a:txBody>
-                    <a:bodyPr/>
-                    <a:lstStyle/>
-                    <a:p>
-                      <a:pPr algn="l"/>
-                      <a:r>
-                        <a:rPr sz="1000" b="0">
-                          <a:solidFill>
-                            <a:srgbClr val="1D1B43"/>
-                          </a:solidFill>
-                          <a:latin typeface="Calibri"/>
-                        </a:rPr>
-                        <a:t>AMAZON SERVICOS DE V - CABO DE SANTO AGOSTINHO /</a:t>
-                      </a:r>
-                    </a:p>
-                  </a:txBody>
-                  <a:tcPr>
-                    <a:solidFill>
-                      <a:srgbClr val="F2F2F2"/>
-                    </a:solidFill>
-                  </a:tcPr>
-                </a:tc>
-                <a:tc>
-                  <a:txBody>
-                    <a:bodyPr/>
-                    <a:lstStyle/>
-                    <a:p>
-                      <a:pPr algn="l"/>
-                      <a:r>
-                        <a:rPr sz="1000" b="0">
-                          <a:solidFill>
-                            <a:srgbClr val="1D1B43"/>
-                          </a:solidFill>
-                          <a:latin typeface="Calibri"/>
-                        </a:rPr>
-                        <a:t>CABO DE SANTO AGOSTINHO/PE</a:t>
-                      </a:r>
-                    </a:p>
-                  </a:txBody>
-                  <a:tcPr>
-                    <a:solidFill>
-                      <a:srgbClr val="F2F2F2"/>
-                    </a:solidFill>
-                  </a:tcPr>
-                </a:tc>
-                <a:tc>
-                  <a:txBody>
-                    <a:bodyPr/>
-                    <a:lstStyle/>
-                    <a:p>
-                      <a:pPr algn="l"/>
-                      <a:r>
-                        <a:rPr sz="1000" b="0">
-                          <a:solidFill>
-                            <a:srgbClr val="1D1B43"/>
-                          </a:solidFill>
-                          <a:latin typeface="Calibri"/>
-                        </a:rPr>
-                        <a:t>15/04/2026</a:t>
-                      </a:r>
-                    </a:p>
-                  </a:txBody>
-                  <a:tcPr>
-                    <a:solidFill>
-                      <a:srgbClr val="F2F2F2"/>
-                    </a:solidFill>
-                  </a:tcPr>
-                </a:tc>
-                <a:tc>
-                  <a:txBody>
-                    <a:bodyPr/>
-                    <a:lstStyle/>
-                    <a:p>
-                      <a:pPr algn="l"/>
-                      <a:r>
-                        <a:rPr sz="1000" b="0">
-                          <a:solidFill>
-                            <a:srgbClr val="1D1B43"/>
-                          </a:solidFill>
-                          <a:latin typeface="Calibri"/>
-                        </a:rPr>
-                        <a:t>ENTREGUE FORA DO PRAZO</a:t>
-                      </a:r>
-                    </a:p>
-                  </a:txBody>
-                  <a:tcPr>
-                    <a:solidFill>
-                      <a:srgbClr val="F2F2F2"/>
-                    </a:solidFill>
-                  </a:tcPr>
-                </a:tc>
-              </a:tr>
-              <a:tr h="381000">
-                <a:tc>
-                  <a:txBody>
-                    <a:bodyPr/>
-                    <a:lstStyle/>
-                    <a:p>
-                      <a:pPr algn="l"/>
-                      <a:r>
-                        <a:rPr sz="1000" b="0">
-                          <a:solidFill>
-                            <a:srgbClr val="1D1B43"/>
-                          </a:solidFill>
-                          <a:latin typeface="Calibri"/>
-                        </a:rPr>
-                        <a:t>278922</a:t>
-                      </a:r>
-                    </a:p>
-                  </a:txBody>
-                  <a:tcPr>
-                    <a:solidFill>
-                      <a:srgbClr val="FFFFFF"/>
-                    </a:solidFill>
-                  </a:tcPr>
-                </a:tc>
-                <a:tc>
-                  <a:txBody>
-                    <a:bodyPr/>
-                    <a:lstStyle/>
-                    <a:p>
-                      <a:pPr algn="l"/>
-                      <a:r>
-                        <a:rPr sz="1000" b="0">
-                          <a:solidFill>
-                            <a:srgbClr val="1D1B43"/>
-                          </a:solidFill>
-                          <a:latin typeface="Calibri"/>
-                        </a:rPr>
-                        <a:t>AMAZON SERVICOS DE V - CAJAMAR / SP</a:t>
-                      </a:r>
-                    </a:p>
-                  </a:txBody>
-                  <a:tcPr>
-                    <a:solidFill>
-                      <a:srgbClr val="FFFFFF"/>
-                    </a:solidFill>
-                  </a:tcPr>
-                </a:tc>
-                <a:tc>
-                  <a:txBody>
-                    <a:bodyPr/>
-                    <a:lstStyle/>
-                    <a:p>
-                      <a:pPr algn="l"/>
-                      <a:r>
-                        <a:rPr sz="1000" b="0">
-                          <a:solidFill>
-                            <a:srgbClr val="1D1B43"/>
-                          </a:solidFill>
-                          <a:latin typeface="Calibri"/>
-                        </a:rPr>
-                        <a:t>CAJAMAR/SP</a:t>
-                      </a:r>
-                    </a:p>
-                  </a:txBody>
-                  <a:tcPr>
-                    <a:solidFill>
-                      <a:srgbClr val="FFFFFF"/>
-                    </a:solidFill>
-                  </a:tcPr>
-                </a:tc>
-                <a:tc>
-                  <a:txBody>
-                    <a:bodyPr/>
-                    <a:lstStyle/>
-                    <a:p>
-                      <a:pPr algn="l"/>
-                      <a:r>
-                        <a:rPr sz="1000" b="0">
-                          <a:solidFill>
-                            <a:srgbClr val="1D1B43"/>
-                          </a:solidFill>
-                          <a:latin typeface="Calibri"/>
-                        </a:rPr>
-                        <a:t>15/04/2026</a:t>
-                      </a:r>
-                    </a:p>
-                  </a:txBody>
-                  <a:tcPr>
-                    <a:solidFill>
-                      <a:srgbClr val="FFFFFF"/>
-                    </a:solidFill>
-                  </a:tcPr>
-                </a:tc>
-                <a:tc>
-                  <a:txBody>
-                    <a:bodyPr/>
-                    <a:lstStyle/>
-                    <a:p>
-                      <a:pPr algn="l"/>
-                      <a:r>
-                        <a:rPr sz="1000" b="0">
-                          <a:solidFill>
-                            <a:srgbClr val="1D1B43"/>
-                          </a:solidFill>
-                          <a:latin typeface="Calibri"/>
-                        </a:rPr>
-                        <a:t>ENTREGUE FORA DO PRAZO</a:t>
-                      </a:r>
-                    </a:p>
-                  </a:txBody>
-                  <a:tcPr>
-                    <a:solidFill>
-                      <a:srgbClr val="FFFFFF"/>
-                    </a:solidFill>
-                  </a:tcPr>
-                </a:tc>
-              </a:tr>
-              <a:tr h="381000">
-                <a:tc>
-                  <a:txBody>
-                    <a:bodyPr/>
-                    <a:lstStyle/>
-                    <a:p>
-                      <a:pPr algn="l"/>
-                      <a:r>
-                        <a:rPr sz="1000" b="0">
-                          <a:solidFill>
-                            <a:srgbClr val="1D1B43"/>
-                          </a:solidFill>
-                          <a:latin typeface="Calibri"/>
-                        </a:rPr>
-                        <a:t>279272</a:t>
-                      </a:r>
-                    </a:p>
-                  </a:txBody>
-                  <a:tcPr>
-                    <a:solidFill>
-                      <a:srgbClr val="F2F2F2"/>
-                    </a:solidFill>
-                  </a:tcPr>
-                </a:tc>
-                <a:tc>
-                  <a:txBody>
-                    <a:bodyPr/>
-                    <a:lstStyle/>
-                    <a:p>
-                      <a:pPr algn="l"/>
-                      <a:r>
-                        <a:rPr sz="1000" b="0">
-                          <a:solidFill>
-                            <a:srgbClr val="1D1B43"/>
-                          </a:solidFill>
-                          <a:latin typeface="Calibri"/>
-                        </a:rPr>
-                        <a:t>AMAZON SERVICOS DE V - CAJAMAR / SP</a:t>
-                      </a:r>
-                    </a:p>
-                  </a:txBody>
-                  <a:tcPr>
-                    <a:solidFill>
-                      <a:srgbClr val="F2F2F2"/>
-                    </a:solidFill>
-                  </a:tcPr>
-                </a:tc>
-                <a:tc>
-                  <a:txBody>
-                    <a:bodyPr/>
-                    <a:lstStyle/>
-                    <a:p>
-                      <a:pPr algn="l"/>
-                      <a:r>
-                        <a:rPr sz="1000" b="0">
-                          <a:solidFill>
-                            <a:srgbClr val="1D1B43"/>
-                          </a:solidFill>
-                          <a:latin typeface="Calibri"/>
-                        </a:rPr>
-                        <a:t>CAJAMAR/SP</a:t>
-                      </a:r>
-                    </a:p>
-                  </a:txBody>
-                  <a:tcPr>
-                    <a:solidFill>
-                      <a:srgbClr val="F2F2F2"/>
-                    </a:solidFill>
-                  </a:tcPr>
-                </a:tc>
-                <a:tc>
-                  <a:txBody>
-                    <a:bodyPr/>
-                    <a:lstStyle/>
-                    <a:p>
-                      <a:pPr algn="l"/>
-                      <a:r>
-                        <a:rPr sz="1000" b="0">
-                          <a:solidFill>
-                            <a:srgbClr val="1D1B43"/>
-                          </a:solidFill>
-                          <a:latin typeface="Calibri"/>
-                        </a:rPr>
-                        <a:t>17/04/2026</a:t>
-                      </a:r>
-                    </a:p>
-                  </a:txBody>
-                  <a:tcPr>
-                    <a:solidFill>
-                      <a:srgbClr val="F2F2F2"/>
-                    </a:solidFill>
-                  </a:tcPr>
-                </a:tc>
-                <a:tc>
-                  <a:txBody>
-                    <a:bodyPr/>
-                    <a:lstStyle/>
-                    <a:p>
-                      <a:pPr algn="l"/>
-                      <a:r>
-                        <a:rPr sz="1000" b="0">
-                          <a:solidFill>
-                            <a:srgbClr val="1D1B43"/>
-                          </a:solidFill>
-                          <a:latin typeface="Calibri"/>
-                        </a:rPr>
-                        <a:t>ENTREGUE FORA DO PRAZO</a:t>
-                      </a:r>
-                    </a:p>
-                  </a:txBody>
-                  <a:tcPr>
-                    <a:solidFill>
-                      <a:srgbClr val="F2F2F2"/>
-                    </a:solidFill>
-                  </a:tcPr>
-                </a:tc>
-              </a:tr>
-              <a:tr h="381000">
-                <a:tc>
-                  <a:txBody>
-                    <a:bodyPr/>
-                    <a:lstStyle/>
-                    <a:p>
-                      <a:pPr algn="l"/>
-                      <a:r>
-                        <a:rPr sz="1000" b="0">
-                          <a:solidFill>
-                            <a:srgbClr val="1D1B43"/>
-                          </a:solidFill>
-                          <a:latin typeface="Calibri"/>
-                        </a:rPr>
-                        <a:t>280636</a:t>
-                      </a:r>
-                    </a:p>
-                  </a:txBody>
-                  <a:tcPr>
-                    <a:solidFill>
-                      <a:srgbClr val="FFFFFF"/>
-                    </a:solidFill>
-                  </a:tcPr>
-                </a:tc>
-                <a:tc>
-                  <a:txBody>
-                    <a:bodyPr/>
-                    <a:lstStyle/>
-                    <a:p>
-                      <a:pPr algn="l"/>
-                      <a:r>
-                        <a:rPr sz="1000" b="0">
-                          <a:solidFill>
-                            <a:srgbClr val="1D1B43"/>
-                          </a:solidFill>
-                          <a:latin typeface="Calibri"/>
-                        </a:rPr>
-                        <a:t>AMAZON SERVICOS DE V - CAJAMAR / SP</a:t>
-                      </a:r>
-                    </a:p>
-                  </a:txBody>
-                  <a:tcPr>
-                    <a:solidFill>
-                      <a:srgbClr val="FFFFFF"/>
-                    </a:solidFill>
-                  </a:tcPr>
-                </a:tc>
-                <a:tc>
-                  <a:txBody>
-                    <a:bodyPr/>
-                    <a:lstStyle/>
-                    <a:p>
-                      <a:pPr algn="l"/>
-                      <a:r>
-                        <a:rPr sz="1000" b="0">
-                          <a:solidFill>
-                            <a:srgbClr val="1D1B43"/>
-                          </a:solidFill>
-                          <a:latin typeface="Calibri"/>
-                        </a:rPr>
-                        <a:t>CAJAMAR/SP</a:t>
-                      </a:r>
-                    </a:p>
-                  </a:txBody>
-                  <a:tcPr>
-                    <a:solidFill>
-                      <a:srgbClr val="FFFFFF"/>
-                    </a:solidFill>
-                  </a:tcPr>
-                </a:tc>
-                <a:tc>
-                  <a:txBody>
-                    <a:bodyPr/>
-                    <a:lstStyle/>
-                    <a:p>
-                      <a:pPr algn="l"/>
-                      <a:r>
-                        <a:rPr sz="1000" b="0">
-                          <a:solidFill>
-                            <a:srgbClr val="1D1B43"/>
-                          </a:solidFill>
-                          <a:latin typeface="Calibri"/>
-                        </a:rPr>
-                        <a:t>28/04/2026</a:t>
-                      </a:r>
-                    </a:p>
-                  </a:txBody>
-                  <a:tcPr>
-                    <a:solidFill>
-                      <a:srgbClr val="FFFFFF"/>
-                    </a:solidFill>
-                  </a:tcPr>
-                </a:tc>
-                <a:tc>
-                  <a:txBody>
-                    <a:bodyPr/>
-                    <a:lstStyle/>
-                    <a:p>
-                      <a:pPr algn="l"/>
-                      <a:r>
-                        <a:rPr sz="1000" b="0">
-                          <a:solidFill>
-                            <a:srgbClr val="1D1B43"/>
-                          </a:solidFill>
-                          <a:latin typeface="Calibri"/>
-                        </a:rPr>
-                        <a:t>ENTREGUE FORA DO PRAZO</a:t>
-                      </a:r>
-                    </a:p>
-                  </a:txBody>
-                  <a:tcPr>
-                    <a:solidFill>
-                      <a:srgbClr val="FFFFFF"/>
-                    </a:solidFill>
-                  </a:tcPr>
-                </a:tc>
-              </a:tr>
-              <a:tr h="381000">
-                <a:tc>
-                  <a:txBody>
-                    <a:bodyPr/>
-                    <a:lstStyle/>
-                    <a:p>
-                      <a:pPr algn="l"/>
-                      <a:r>
-                        <a:rPr sz="1000" b="0">
-                          <a:solidFill>
-                            <a:srgbClr val="1D1B43"/>
-                          </a:solidFill>
-                          <a:latin typeface="Calibri"/>
-                        </a:rPr>
-                        <a:t>281194</a:t>
-                      </a:r>
-                    </a:p>
-                  </a:txBody>
-                  <a:tcPr>
-                    <a:solidFill>
-                      <a:srgbClr val="F2F2F2"/>
-                    </a:solidFill>
-                  </a:tcPr>
-                </a:tc>
-                <a:tc>
-                  <a:txBody>
-                    <a:bodyPr/>
-                    <a:lstStyle/>
-                    <a:p>
-                      <a:pPr algn="l"/>
-                      <a:r>
-                        <a:rPr sz="1000" b="0">
-                          <a:solidFill>
-                            <a:srgbClr val="1D1B43"/>
-                          </a:solidFill>
-                          <a:latin typeface="Calibri"/>
-                        </a:rPr>
-                        <a:t>AMAZON SERVICOS DE V - CAJAMAR / SP</a:t>
-                      </a:r>
-                    </a:p>
-                  </a:txBody>
-                  <a:tcPr>
-                    <a:solidFill>
-                      <a:srgbClr val="F2F2F2"/>
-                    </a:solidFill>
-                  </a:tcPr>
-                </a:tc>
-                <a:tc>
-                  <a:txBody>
-                    <a:bodyPr/>
-                    <a:lstStyle/>
-                    <a:p>
-                      <a:pPr algn="l"/>
-                      <a:r>
-                        <a:rPr sz="1000" b="0">
-                          <a:solidFill>
-                            <a:srgbClr val="1D1B43"/>
-                          </a:solidFill>
-                          <a:latin typeface="Calibri"/>
-                        </a:rPr>
-                        <a:t>CAJAMAR/SP</a:t>
-                      </a:r>
-                    </a:p>
-                  </a:txBody>
-                  <a:tcPr>
-                    <a:solidFill>
-                      <a:srgbClr val="F2F2F2"/>
-                    </a:solidFill>
-                  </a:tcPr>
-                </a:tc>
-                <a:tc>
-                  <a:txBody>
-                    <a:bodyPr/>
-                    <a:lstStyle/>
-                    <a:p>
-                      <a:pPr algn="l"/>
-                      <a:r>
-                        <a:rPr sz="1000" b="0">
-                          <a:solidFill>
-                            <a:srgbClr val="1D1B43"/>
-                          </a:solidFill>
-                          <a:latin typeface="Calibri"/>
-                        </a:rPr>
-                        <a:t>30/04/2026</a:t>
-                      </a:r>
-                    </a:p>
-                  </a:txBody>
-                  <a:tcPr>
-                    <a:solidFill>
-                      <a:srgbClr val="F2F2F2"/>
-                    </a:solidFill>
-                  </a:tcPr>
-                </a:tc>
-                <a:tc>
-                  <a:txBody>
-                    <a:bodyPr/>
-                    <a:lstStyle/>
-                    <a:p>
-                      <a:pPr algn="l"/>
-                      <a:r>
-                        <a:rPr sz="1000" b="0">
-                          <a:solidFill>
-                            <a:srgbClr val="1D1B43"/>
-                          </a:solidFill>
-                          <a:latin typeface="Calibri"/>
-                        </a:rPr>
-                        <a:t>ENTREGUE FORA DO PRAZO</a:t>
-                      </a:r>
-                    </a:p>
-                  </a:txBody>
-                  <a:tcPr>
-                    <a:solidFill>
-                      <a:srgbClr val="F2F2F2"/>
-                    </a:solidFill>
-                  </a:tcPr>
-                </a:tc>
-              </a:tr>
-              <a:tr h="381000">
-                <a:tc>
-                  <a:txBody>
-                    <a:bodyPr/>
-                    <a:lstStyle/>
-                    <a:p>
-                      <a:pPr algn="l"/>
-                      <a:r>
-                        <a:rPr sz="1000" b="0">
-                          <a:solidFill>
-                            <a:srgbClr val="1D1B43"/>
-                          </a:solidFill>
-                          <a:latin typeface="Calibri"/>
-                        </a:rPr>
-                        <a:t>281204</a:t>
-                      </a:r>
-                    </a:p>
-                  </a:txBody>
-                  <a:tcPr>
-                    <a:solidFill>
-                      <a:srgbClr val="FFFFFF"/>
-                    </a:solidFill>
-                  </a:tcPr>
-                </a:tc>
-                <a:tc>
-                  <a:txBody>
-                    <a:bodyPr/>
-                    <a:lstStyle/>
-                    <a:p>
-                      <a:pPr algn="l"/>
-                      <a:r>
-                        <a:rPr sz="1000" b="0">
-                          <a:solidFill>
-                            <a:srgbClr val="1D1B43"/>
-                          </a:solidFill>
-                          <a:latin typeface="Calibri"/>
-                        </a:rPr>
-                        <a:t>AMAZON LOGISTICA DO - CAJAMAR / SP</a:t>
-                      </a:r>
-                    </a:p>
-                  </a:txBody>
-                  <a:tcPr>
-                    <a:solidFill>
-                      <a:srgbClr val="FFFFFF"/>
-                    </a:solidFill>
-                  </a:tcPr>
-                </a:tc>
-                <a:tc>
-                  <a:txBody>
-                    <a:bodyPr/>
-                    <a:lstStyle/>
-                    <a:p>
-                      <a:pPr algn="l"/>
-                      <a:r>
-                        <a:rPr sz="1000" b="0">
-                          <a:solidFill>
-                            <a:srgbClr val="1D1B43"/>
-                          </a:solidFill>
-                          <a:latin typeface="Calibri"/>
-                        </a:rPr>
-                        <a:t>CAJAMAR/SP</a:t>
-                      </a:r>
-                    </a:p>
-                  </a:txBody>
-                  <a:tcPr>
-                    <a:solidFill>
-                      <a:srgbClr val="FFFFFF"/>
-                    </a:solidFill>
-                  </a:tcPr>
-                </a:tc>
-                <a:tc>
-                  <a:txBody>
-                    <a:bodyPr/>
-                    <a:lstStyle/>
-                    <a:p>
-                      <a:pPr algn="l"/>
-                      <a:r>
-                        <a:rPr sz="1000" b="0">
-                          <a:solidFill>
-                            <a:srgbClr val="1D1B43"/>
-                          </a:solidFill>
-                          <a:latin typeface="Calibri"/>
-                        </a:rPr>
-                        <a:t>30/04/2026</a:t>
-                      </a:r>
-                    </a:p>
-                  </a:txBody>
-                  <a:tcPr>
-                    <a:solidFill>
-                      <a:srgbClr val="FFFFFF"/>
-                    </a:solidFill>
-                  </a:tcPr>
-                </a:tc>
-                <a:tc>
-                  <a:txBody>
-                    <a:bodyPr/>
-                    <a:lstStyle/>
-                    <a:p>
-                      <a:pPr algn="l"/>
-                      <a:r>
-                        <a:rPr sz="1000" b="0">
-                          <a:solidFill>
-                            <a:srgbClr val="1D1B43"/>
-                          </a:solidFill>
-                          <a:latin typeface="Calibri"/>
-                        </a:rPr>
-                        <a:t>ENTREGUE FORA DO PRAZO</a:t>
-                      </a:r>
-                    </a:p>
-                  </a:txBody>
-                  <a:tcPr>
-                    <a:solidFill>
-                      <a:srgbClr val="FFFFFF"/>
                     </a:solidFill>
                   </a:tcPr>
                 </a:tc>
@@ -7111,7 +5928,7 @@
                           </a:solidFill>
                           <a:latin typeface="Calibri"/>
                         </a:rPr>
-                        <a:t>7</a:t>
+                        <a:t>15</a:t>
                       </a:r>
                     </a:p>
                   </a:txBody>
@@ -7134,7 +5951,7 @@
                           </a:solidFill>
                           <a:latin typeface="Calibri"/>
                         </a:rPr>
-                        <a:t>10</a:t>
+                        <a:t>2</a:t>
                       </a:r>
                     </a:p>
                   </a:txBody>
@@ -7157,7 +5974,7 @@
                           </a:solidFill>
                           <a:latin typeface="Calibri"/>
                         </a:rPr>
-                        <a:t>41.2%</a:t>
+                        <a:t>88.2%</a:t>
                       </a:r>
                     </a:p>
                   </a:txBody>
@@ -7180,7 +5997,7 @@
                           </a:solidFill>
                           <a:latin typeface="Calibri"/>
                         </a:rPr>
-                        <a:t>Atencao</a:t>
+                        <a:t>Regular</a:t>
                       </a:r>
                     </a:p>
                   </a:txBody>
@@ -7391,7 +6208,7 @@
                           </a:solidFill>
                           <a:latin typeface="Calibri"/>
                         </a:rPr>
-                        <a:t>3</a:t>
+                        <a:t>4</a:t>
                       </a:r>
                     </a:p>
                   </a:txBody>
@@ -7414,7 +6231,7 @@
                           </a:solidFill>
                           <a:latin typeface="Calibri"/>
                         </a:rPr>
-                        <a:t>1</a:t>
+                        <a:t>0</a:t>
                       </a:r>
                     </a:p>
                   </a:txBody>
@@ -7437,7 +6254,7 @@
                           </a:solidFill>
                           <a:latin typeface="Calibri"/>
                         </a:rPr>
-                        <a:t>75.0%</a:t>
+                        <a:t>100.0%</a:t>
                       </a:r>
                     </a:p>
                   </a:txBody>
@@ -7460,7 +6277,7 @@
                           </a:solidFill>
                           <a:latin typeface="Calibri"/>
                         </a:rPr>
-                        <a:t>Atencao</a:t>
+                        <a:t>Excelente</a:t>
                       </a:r>
                     </a:p>
                   </a:txBody>
@@ -8856,7 +7673,7 @@
                           </a:solidFill>
                           <a:latin typeface="Calibri"/>
                         </a:rPr>
-                        <a:t>7</a:t>
+                        <a:t>14</a:t>
                       </a:r>
                     </a:p>
                   </a:txBody>
@@ -8879,7 +7696,7 @@
                           </a:solidFill>
                           <a:latin typeface="Calibri"/>
                         </a:rPr>
-                        <a:t>8</a:t>
+                        <a:t>1</a:t>
                       </a:r>
                     </a:p>
                   </a:txBody>
@@ -8902,7 +7719,7 @@
                           </a:solidFill>
                           <a:latin typeface="Calibri"/>
                         </a:rPr>
-                        <a:t>46.7%</a:t>
+                        <a:t>93.3%</a:t>
                       </a:r>
                     </a:p>
                   </a:txBody>
@@ -8925,7 +7742,7 @@
                           </a:solidFill>
                           <a:latin typeface="Calibri"/>
                         </a:rPr>
-                        <a:t>Atencao</a:t>
+                        <a:t>Regular</a:t>
                       </a:r>
                     </a:p>
                   </a:txBody>
@@ -9019,7 +7836,7 @@
                           </a:solidFill>
                           <a:latin typeface="Calibri"/>
                         </a:rPr>
-                        <a:t>2</a:t>
+                        <a:t>3</a:t>
                       </a:r>
                     </a:p>
                   </a:txBody>
@@ -9042,7 +7859,7 @@
                           </a:solidFill>
                           <a:latin typeface="Calibri"/>
                         </a:rPr>
-                        <a:t>1</a:t>
+                        <a:t>0</a:t>
                       </a:r>
                     </a:p>
                   </a:txBody>
@@ -9065,7 +7882,7 @@
                           </a:solidFill>
                           <a:latin typeface="Calibri"/>
                         </a:rPr>
-                        <a:t>66.7%</a:t>
+                        <a:t>100.0%</a:t>
                       </a:r>
                     </a:p>
                   </a:txBody>
@@ -9088,7 +7905,7 @@
                           </a:solidFill>
                           <a:latin typeface="Calibri"/>
                         </a:rPr>
-                        <a:t>Atencao</a:t>
+                        <a:t>Excelente</a:t>
                       </a:r>
                     </a:p>
                   </a:txBody>
@@ -9508,7 +8325,7 @@
                           </a:solidFill>
                           <a:latin typeface="Calibri"/>
                         </a:rPr>
-                        <a:t>0</a:t>
+                        <a:t>1</a:t>
                       </a:r>
                     </a:p>
                   </a:txBody>
@@ -9531,7 +8348,7 @@
                           </a:solidFill>
                           <a:latin typeface="Calibri"/>
                         </a:rPr>
-                        <a:t>2</a:t>
+                        <a:t>1</a:t>
                       </a:r>
                     </a:p>
                   </a:txBody>
@@ -9554,7 +8371,7 @@
                           </a:solidFill>
                           <a:latin typeface="Calibri"/>
                         </a:rPr>
-                        <a:t>0.0%</a:t>
+                        <a:t>50.0%</a:t>
                       </a:r>
                     </a:p>
                   </a:txBody>

--- a/VENTAPEL_BRASIL_COMERCIAL_IMPO.pptx
+++ b/VENTAPEL_BRASIL_COMERCIAL_IMPO.pptx
@@ -143,10 +143,13 @@
           </c:spPr>
           <c:cat>
             <c:strRef>
-              <c:f>Sheet1!$A$2:$A$2</c:f>
+              <c:f>Sheet1!$A$2:$A$3</c:f>
               <c:strCache>
-                <c:ptCount val="1"/>
+                <c:ptCount val="2"/>
                 <c:pt idx="0">
+                  <c:v>Maio 2026</c:v>
+                </c:pt>
+                <c:pt idx="1">
                   <c:v>Abril 2026</c:v>
                 </c:pt>
               </c:strCache>
@@ -154,11 +157,14 @@
           </c:cat>
           <c:val>
             <c:numRef>
-              <c:f>Sheet1!$B$2:$B$2</c:f>
+              <c:f>Sheet1!$B$2:$B$3</c:f>
               <c:numCache>
                 <c:formatCode>General</c:formatCode>
-                <c:ptCount val="1"/>
+                <c:ptCount val="2"/>
                 <c:pt idx="0">
+                  <c:v>5</c:v>
+                </c:pt>
+                <c:pt idx="1">
                   <c:v>32</c:v>
                 </c:pt>
               </c:numCache>
@@ -186,10 +192,13 @@
           </c:spPr>
           <c:cat>
             <c:strRef>
-              <c:f>Sheet1!$A$2:$A$2</c:f>
+              <c:f>Sheet1!$A$2:$A$3</c:f>
               <c:strCache>
-                <c:ptCount val="1"/>
+                <c:ptCount val="2"/>
                 <c:pt idx="0">
+                  <c:v>Maio 2026</c:v>
+                </c:pt>
+                <c:pt idx="1">
                   <c:v>Abril 2026</c:v>
                 </c:pt>
               </c:strCache>
@@ -197,11 +206,14 @@
           </c:cat>
           <c:val>
             <c:numRef>
-              <c:f>Sheet1!$C$2:$C$2</c:f>
+              <c:f>Sheet1!$C$2:$C$3</c:f>
               <c:numCache>
                 <c:formatCode>General</c:formatCode>
-                <c:ptCount val="1"/>
+                <c:ptCount val="2"/>
                 <c:pt idx="0">
+                  <c:v>1</c:v>
+                </c:pt>
+                <c:pt idx="1">
                   <c:v>2</c:v>
                 </c:pt>
               </c:numCache>
@@ -4142,7 +4154,7 @@
                           </a:solidFill>
                           <a:latin typeface="Calibri"/>
                         </a:rPr>
-                        <a:t>Marco 2026</a:t>
+                        <a:t>Maio 2026</a:t>
                       </a:r>
                     </a:p>
                   </a:txBody>
@@ -4236,7 +4248,7 @@
                           </a:solidFill>
                           <a:latin typeface="Calibri"/>
                         </a:rPr>
-                        <a:t>-</a:t>
+                        <a:t>6</a:t>
                       </a:r>
                     </a:p>
                   </a:txBody>
@@ -4282,7 +4294,7 @@
                           </a:solidFill>
                           <a:latin typeface="Calibri"/>
                         </a:rPr>
-                        <a:t>-</a:t>
+                        <a:t>+ 28</a:t>
                       </a:r>
                     </a:p>
                   </a:txBody>
@@ -4330,7 +4342,7 @@
                           </a:solidFill>
                           <a:latin typeface="Calibri"/>
                         </a:rPr>
-                        <a:t>-</a:t>
+                        <a:t>5</a:t>
                       </a:r>
                     </a:p>
                   </a:txBody>
@@ -4376,7 +4388,7 @@
                           </a:solidFill>
                           <a:latin typeface="Calibri"/>
                         </a:rPr>
-                        <a:t>-</a:t>
+                        <a:t>+ 27</a:t>
                       </a:r>
                     </a:p>
                   </a:txBody>
@@ -4424,7 +4436,7 @@
                           </a:solidFill>
                           <a:latin typeface="Calibri"/>
                         </a:rPr>
-                        <a:t>-</a:t>
+                        <a:t>1</a:t>
                       </a:r>
                     </a:p>
                   </a:txBody>
@@ -4470,7 +4482,7 @@
                           </a:solidFill>
                           <a:latin typeface="Calibri"/>
                         </a:rPr>
-                        <a:t>-</a:t>
+                        <a:t>+ 1</a:t>
                       </a:r>
                     </a:p>
                   </a:txBody>
@@ -4518,7 +4530,7 @@
                           </a:solidFill>
                           <a:latin typeface="Calibri"/>
                         </a:rPr>
-                        <a:t>-</a:t>
+                        <a:t>83.3%</a:t>
                       </a:r>
                     </a:p>
                   </a:txBody>
@@ -4564,7 +4576,7 @@
                           </a:solidFill>
                           <a:latin typeface="Calibri"/>
                         </a:rPr>
-                        <a:t>-</a:t>
+                        <a:t>+ 10.8pp</a:t>
                       </a:r>
                     </a:p>
                   </a:txBody>
@@ -4735,7 +4747,7 @@
         </p:nvGraphicFramePr>
         <p:xfrm>
           <a:off x="7955279" y="2286000"/>
-          <a:ext cx="4480560" cy="877824"/>
+          <a:ext cx="4480560" cy="1316736"/>
         </p:xfrm>
         <a:graphic>
           <a:graphicData uri="http://schemas.openxmlformats.org/drawingml/2006/table">
@@ -4881,13 +4893,130 @@
                           </a:solidFill>
                           <a:latin typeface="Calibri"/>
                         </a:rPr>
+                        <a:t>Maio 2026</a:t>
+                      </a:r>
+                    </a:p>
+                  </a:txBody>
+                  <a:tcPr>
+                    <a:solidFill>
+                      <a:srgbClr val="FFFFFF"/>
+                    </a:solidFill>
+                  </a:tcPr>
+                </a:tc>
+                <a:tc>
+                  <a:txBody>
+                    <a:bodyPr/>
+                    <a:lstStyle/>
+                    <a:p>
+                      <a:pPr algn="l"/>
+                      <a:r>
+                        <a:rPr sz="1000" b="0">
+                          <a:solidFill>
+                            <a:srgbClr val="1D1B43"/>
+                          </a:solidFill>
+                          <a:latin typeface="Calibri"/>
+                        </a:rPr>
+                        <a:t>6</a:t>
+                      </a:r>
+                    </a:p>
+                  </a:txBody>
+                  <a:tcPr>
+                    <a:solidFill>
+                      <a:srgbClr val="FFFFFF"/>
+                    </a:solidFill>
+                  </a:tcPr>
+                </a:tc>
+                <a:tc>
+                  <a:txBody>
+                    <a:bodyPr/>
+                    <a:lstStyle/>
+                    <a:p>
+                      <a:pPr algn="l"/>
+                      <a:r>
+                        <a:rPr sz="1000" b="0">
+                          <a:solidFill>
+                            <a:srgbClr val="1D1B43"/>
+                          </a:solidFill>
+                          <a:latin typeface="Calibri"/>
+                        </a:rPr>
+                        <a:t>5</a:t>
+                      </a:r>
+                    </a:p>
+                  </a:txBody>
+                  <a:tcPr>
+                    <a:solidFill>
+                      <a:srgbClr val="FFFFFF"/>
+                    </a:solidFill>
+                  </a:tcPr>
+                </a:tc>
+                <a:tc>
+                  <a:txBody>
+                    <a:bodyPr/>
+                    <a:lstStyle/>
+                    <a:p>
+                      <a:pPr algn="l"/>
+                      <a:r>
+                        <a:rPr sz="1000" b="0">
+                          <a:solidFill>
+                            <a:srgbClr val="1D1B43"/>
+                          </a:solidFill>
+                          <a:latin typeface="Calibri"/>
+                        </a:rPr>
+                        <a:t>1</a:t>
+                      </a:r>
+                    </a:p>
+                  </a:txBody>
+                  <a:tcPr>
+                    <a:solidFill>
+                      <a:srgbClr val="FFFFFF"/>
+                    </a:solidFill>
+                  </a:tcPr>
+                </a:tc>
+                <a:tc>
+                  <a:txBody>
+                    <a:bodyPr/>
+                    <a:lstStyle/>
+                    <a:p>
+                      <a:pPr algn="l"/>
+                      <a:r>
+                        <a:rPr sz="1000" b="0">
+                          <a:solidFill>
+                            <a:srgbClr val="1D1B43"/>
+                          </a:solidFill>
+                          <a:latin typeface="Calibri"/>
+                        </a:rPr>
+                        <a:t>83.3%</a:t>
+                      </a:r>
+                    </a:p>
+                  </a:txBody>
+                  <a:tcPr>
+                    <a:solidFill>
+                      <a:srgbClr val="FFFFFF"/>
+                    </a:solidFill>
+                  </a:tcPr>
+                </a:tc>
+              </a:tr>
+              <a:tr h="438912">
+                <a:tc>
+                  <a:txBody>
+                    <a:bodyPr/>
+                    <a:lstStyle/>
+                    <a:p>
+                      <a:pPr algn="l"/>
+                      <a:r>
+                        <a:rPr sz="1000" b="0">
+                          <a:solidFill>
+                            <a:srgbClr val="1D1B43"/>
+                          </a:solidFill>
+                          <a:latin typeface="Calibri"/>
+                        </a:rPr>
                         <a:t>Abril 2026</a:t>
                       </a:r>
                     </a:p>
                   </a:txBody>
                   <a:tcPr>
                     <a:solidFill>
-                      <a:srgbClr val="FFFFFF"/>
+                      <a:srgbClr val="F2F2F2"/>
                     </a:solidFill>
                   </a:tcPr>
                 </a:tc>
@@ -4910,7 +5039,7 @@
                   </a:txBody>
                   <a:tcPr>
                     <a:solidFill>
-                      <a:srgbClr val="FFFFFF"/>
+                      <a:srgbClr val="F2F2F2"/>
                     </a:solidFill>
                   </a:tcPr>
                 </a:tc>
@@ -4933,7 +5062,7 @@
                   </a:txBody>
                   <a:tcPr>
                     <a:solidFill>
-                      <a:srgbClr val="FFFFFF"/>
+                      <a:srgbClr val="F2F2F2"/>
                     </a:solidFill>
                   </a:tcPr>
                 </a:tc>
@@ -4956,7 +5085,7 @@
                   </a:txBody>
                   <a:tcPr>
                     <a:solidFill>
-                      <a:srgbClr val="FFFFFF"/>
+                      <a:srgbClr val="F2F2F2"/>
                     </a:solidFill>
                   </a:tcPr>
                 </a:tc>
@@ -4979,7 +5108,7 @@
                   </a:txBody>
                   <a:tcPr>
                     <a:solidFill>
-                      <a:srgbClr val="FFFFFF"/>
+                      <a:srgbClr val="F2F2F2"/>
                     </a:solidFill>
                   </a:tcPr>
                 </a:tc>
